--- a/Memorylayout/Memorylayout/Memory layout.pptx
+++ b/Memorylayout/Memorylayout/Memory layout.pptx
@@ -5,7 +5,7 @@
     <p:sldMasterId id="2147483648" r:id="rId1"/>
   </p:sldMasterIdLst>
   <p:notesMasterIdLst>
-    <p:notesMasterId r:id="rId16"/>
+    <p:notesMasterId r:id="rId24"/>
   </p:notesMasterIdLst>
   <p:sldIdLst>
     <p:sldId id="257" r:id="rId2"/>
@@ -22,6 +22,14 @@
     <p:sldId id="267" r:id="rId13"/>
     <p:sldId id="268" r:id="rId14"/>
     <p:sldId id="269" r:id="rId15"/>
+    <p:sldId id="270" r:id="rId16"/>
+    <p:sldId id="271" r:id="rId17"/>
+    <p:sldId id="272" r:id="rId18"/>
+    <p:sldId id="273" r:id="rId19"/>
+    <p:sldId id="274" r:id="rId20"/>
+    <p:sldId id="275" r:id="rId21"/>
+    <p:sldId id="276" r:id="rId22"/>
+    <p:sldId id="277" r:id="rId23"/>
   </p:sldIdLst>
   <p:sldSz cx="12192000" cy="6858000"/>
   <p:notesSz cx="6858000" cy="9144000"/>
@@ -210,7 +218,7 @@
           <a:p>
             <a:fld id="{526ED2B1-949B-43F1-9127-D2E97EA64BBD}" type="datetimeFigureOut">
               <a:rPr lang="en-US" smtClean="0"/>
-              <a:t>6/11/2026</a:t>
+              <a:t>6/12/2026</a:t>
             </a:fld>
             <a:endParaRPr lang="en-US"/>
           </a:p>
@@ -1113,7 +1121,7 @@
           <a:p>
             <a:fld id="{9A7DBB54-11E0-488E-B009-D5743A6C94B4}" type="datetimeFigureOut">
               <a:rPr lang="en-US" smtClean="0"/>
-              <a:t>6/11/2026</a:t>
+              <a:t>6/12/2026</a:t>
             </a:fld>
             <a:endParaRPr lang="en-US"/>
           </a:p>
@@ -1283,7 +1291,7 @@
           <a:p>
             <a:fld id="{9A7DBB54-11E0-488E-B009-D5743A6C94B4}" type="datetimeFigureOut">
               <a:rPr lang="en-US" smtClean="0"/>
-              <a:t>6/11/2026</a:t>
+              <a:t>6/12/2026</a:t>
             </a:fld>
             <a:endParaRPr lang="en-US"/>
           </a:p>
@@ -1463,7 +1471,7 @@
           <a:p>
             <a:fld id="{9A7DBB54-11E0-488E-B009-D5743A6C94B4}" type="datetimeFigureOut">
               <a:rPr lang="en-US" smtClean="0"/>
-              <a:t>6/11/2026</a:t>
+              <a:t>6/12/2026</a:t>
             </a:fld>
             <a:endParaRPr lang="en-US"/>
           </a:p>
@@ -1633,7 +1641,7 @@
           <a:p>
             <a:fld id="{9A7DBB54-11E0-488E-B009-D5743A6C94B4}" type="datetimeFigureOut">
               <a:rPr lang="en-US" smtClean="0"/>
-              <a:t>6/11/2026</a:t>
+              <a:t>6/12/2026</a:t>
             </a:fld>
             <a:endParaRPr lang="en-US"/>
           </a:p>
@@ -1879,7 +1887,7 @@
           <a:p>
             <a:fld id="{9A7DBB54-11E0-488E-B009-D5743A6C94B4}" type="datetimeFigureOut">
               <a:rPr lang="en-US" smtClean="0"/>
-              <a:t>6/11/2026</a:t>
+              <a:t>6/12/2026</a:t>
             </a:fld>
             <a:endParaRPr lang="en-US"/>
           </a:p>
@@ -2111,7 +2119,7 @@
           <a:p>
             <a:fld id="{9A7DBB54-11E0-488E-B009-D5743A6C94B4}" type="datetimeFigureOut">
               <a:rPr lang="en-US" smtClean="0"/>
-              <a:t>6/11/2026</a:t>
+              <a:t>6/12/2026</a:t>
             </a:fld>
             <a:endParaRPr lang="en-US"/>
           </a:p>
@@ -2478,7 +2486,7 @@
           <a:p>
             <a:fld id="{9A7DBB54-11E0-488E-B009-D5743A6C94B4}" type="datetimeFigureOut">
               <a:rPr lang="en-US" smtClean="0"/>
-              <a:t>6/11/2026</a:t>
+              <a:t>6/12/2026</a:t>
             </a:fld>
             <a:endParaRPr lang="en-US"/>
           </a:p>
@@ -2596,7 +2604,7 @@
           <a:p>
             <a:fld id="{9A7DBB54-11E0-488E-B009-D5743A6C94B4}" type="datetimeFigureOut">
               <a:rPr lang="en-US" smtClean="0"/>
-              <a:t>6/11/2026</a:t>
+              <a:t>6/12/2026</a:t>
             </a:fld>
             <a:endParaRPr lang="en-US"/>
           </a:p>
@@ -2691,7 +2699,7 @@
           <a:p>
             <a:fld id="{9A7DBB54-11E0-488E-B009-D5743A6C94B4}" type="datetimeFigureOut">
               <a:rPr lang="en-US" smtClean="0"/>
-              <a:t>6/11/2026</a:t>
+              <a:t>6/12/2026</a:t>
             </a:fld>
             <a:endParaRPr lang="en-US"/>
           </a:p>
@@ -2968,7 +2976,7 @@
           <a:p>
             <a:fld id="{9A7DBB54-11E0-488E-B009-D5743A6C94B4}" type="datetimeFigureOut">
               <a:rPr lang="en-US" smtClean="0"/>
-              <a:t>6/11/2026</a:t>
+              <a:t>6/12/2026</a:t>
             </a:fld>
             <a:endParaRPr lang="en-US"/>
           </a:p>
@@ -3221,7 +3229,7 @@
           <a:p>
             <a:fld id="{9A7DBB54-11E0-488E-B009-D5743A6C94B4}" type="datetimeFigureOut">
               <a:rPr lang="en-US" smtClean="0"/>
-              <a:t>6/11/2026</a:t>
+              <a:t>6/12/2026</a:t>
             </a:fld>
             <a:endParaRPr lang="en-US"/>
           </a:p>
@@ -3434,7 +3442,7 @@
           <a:p>
             <a:fld id="{9A7DBB54-11E0-488E-B009-D5743A6C94B4}" type="datetimeFigureOut">
               <a:rPr lang="en-US" smtClean="0"/>
-              <a:t>6/11/2026</a:t>
+              <a:t>6/12/2026</a:t>
             </a:fld>
             <a:endParaRPr lang="en-US"/>
           </a:p>
@@ -6025,7 +6033,7 @@
         </p:nvSpPr>
         <p:spPr>
           <a:xfrm>
-            <a:off x="1619794" y="658727"/>
+            <a:off x="1349829" y="234280"/>
             <a:ext cx="6096000" cy="646331"/>
           </a:xfrm>
           <a:prstGeom prst="rect">
@@ -6146,7 +6154,7 @@
         </p:nvSpPr>
         <p:spPr>
           <a:xfrm>
-            <a:off x="1550126" y="1471748"/>
+            <a:off x="1349829" y="2005987"/>
             <a:ext cx="9787166" cy="369332"/>
           </a:xfrm>
           <a:prstGeom prst="rect">
@@ -6478,10 +6486,2869 @@
           </a:p>
         </p:txBody>
       </p:sp>
+      <p:sp>
+        <p:nvSpPr>
+          <p:cNvPr id="2" name="Rectangle 1"/>
+          <p:cNvSpPr/>
+          <p:nvPr/>
+        </p:nvSpPr>
+        <p:spPr>
+          <a:xfrm>
+            <a:off x="1240639" y="3533894"/>
+            <a:ext cx="2865785" cy="369332"/>
+          </a:xfrm>
+          <a:prstGeom prst="rect">
+            <a:avLst/>
+          </a:prstGeom>
+        </p:spPr>
+        <p:txBody>
+          <a:bodyPr wrap="none">
+            <a:spAutoFit/>
+          </a:bodyPr>
+          <a:lstStyle/>
+          <a:p>
+            <a:r>
+              <a:rPr lang="en-US" dirty="0"/>
+              <a:t>Con </a:t>
+            </a:r>
+            <a:r>
+              <a:rPr lang="en-US" dirty="0" err="1"/>
+              <a:t>trỏ</a:t>
+            </a:r>
+            <a:r>
+              <a:rPr lang="en-US" dirty="0"/>
+              <a:t> </a:t>
+            </a:r>
+            <a:r>
+              <a:rPr lang="en-US" dirty="0" err="1"/>
+              <a:t>và</a:t>
+            </a:r>
+            <a:r>
+              <a:rPr lang="en-US" dirty="0"/>
+              <a:t> </a:t>
+            </a:r>
+            <a:r>
+              <a:rPr lang="en-US" dirty="0" err="1"/>
+              <a:t>Tham</a:t>
+            </a:r>
+            <a:r>
+              <a:rPr lang="en-US" dirty="0"/>
+              <a:t> </a:t>
+            </a:r>
+            <a:r>
+              <a:rPr lang="en-US" dirty="0" err="1"/>
+              <a:t>số</a:t>
+            </a:r>
+            <a:r>
+              <a:rPr lang="en-US" dirty="0"/>
+              <a:t> </a:t>
+            </a:r>
+            <a:r>
+              <a:rPr lang="en-US" dirty="0" err="1"/>
+              <a:t>của</a:t>
+            </a:r>
+            <a:r>
+              <a:rPr lang="en-US" dirty="0"/>
+              <a:t> </a:t>
+            </a:r>
+            <a:r>
+              <a:rPr lang="en-US" dirty="0" err="1"/>
+              <a:t>Hàm</a:t>
+            </a:r>
+            <a:endParaRPr lang="en-US" dirty="0"/>
+          </a:p>
+        </p:txBody>
+      </p:sp>
+      <p:pic>
+        <p:nvPicPr>
+          <p:cNvPr id="3" name="Picture 2"/>
+          <p:cNvPicPr>
+            <a:picLocks noChangeAspect="1"/>
+          </p:cNvPicPr>
+          <p:nvPr/>
+        </p:nvPicPr>
+        <p:blipFill>
+          <a:blip r:embed="rId2"/>
+          <a:stretch>
+            <a:fillRect/>
+          </a:stretch>
+        </p:blipFill>
+        <p:spPr>
+          <a:xfrm>
+            <a:off x="2029097" y="4180984"/>
+            <a:ext cx="1695687" cy="476316"/>
+          </a:xfrm>
+          <a:prstGeom prst="rect">
+            <a:avLst/>
+          </a:prstGeom>
+        </p:spPr>
+      </p:pic>
+      <p:pic>
+        <p:nvPicPr>
+          <p:cNvPr id="5" name="Picture 4"/>
+          <p:cNvPicPr>
+            <a:picLocks noChangeAspect="1"/>
+          </p:cNvPicPr>
+          <p:nvPr/>
+        </p:nvPicPr>
+        <p:blipFill>
+          <a:blip r:embed="rId3"/>
+          <a:stretch>
+            <a:fillRect/>
+          </a:stretch>
+        </p:blipFill>
+        <p:spPr>
+          <a:xfrm>
+            <a:off x="879565" y="4668007"/>
+            <a:ext cx="4478569" cy="1856066"/>
+          </a:xfrm>
+          <a:prstGeom prst="rect">
+            <a:avLst/>
+          </a:prstGeom>
+        </p:spPr>
+      </p:pic>
+      <p:pic>
+        <p:nvPicPr>
+          <p:cNvPr id="7" name="Picture 6"/>
+          <p:cNvPicPr>
+            <a:picLocks noChangeAspect="1"/>
+          </p:cNvPicPr>
+          <p:nvPr/>
+        </p:nvPicPr>
+        <p:blipFill>
+          <a:blip r:embed="rId4"/>
+          <a:stretch>
+            <a:fillRect/>
+          </a:stretch>
+        </p:blipFill>
+        <p:spPr>
+          <a:xfrm>
+            <a:off x="5529942" y="4735677"/>
+            <a:ext cx="6513087" cy="1788396"/>
+          </a:xfrm>
+          <a:prstGeom prst="rect">
+            <a:avLst/>
+          </a:prstGeom>
+        </p:spPr>
+      </p:pic>
+      <p:sp>
+        <p:nvSpPr>
+          <p:cNvPr id="9" name="Rectangle 8"/>
+          <p:cNvSpPr/>
+          <p:nvPr/>
+        </p:nvSpPr>
+        <p:spPr>
+          <a:xfrm>
+            <a:off x="2717081" y="1342655"/>
+            <a:ext cx="649601" cy="369332"/>
+          </a:xfrm>
+          <a:prstGeom prst="rect">
+            <a:avLst/>
+          </a:prstGeom>
+        </p:spPr>
+        <p:txBody>
+          <a:bodyPr wrap="none">
+            <a:spAutoFit/>
+          </a:bodyPr>
+          <a:lstStyle/>
+          <a:p>
+            <a:r>
+              <a:rPr lang="en-US" dirty="0"/>
+              <a:t>pa++</a:t>
+            </a:r>
+          </a:p>
+        </p:txBody>
+      </p:sp>
+      <p:sp>
+        <p:nvSpPr>
+          <p:cNvPr id="10" name="Rectangle 9"/>
+          <p:cNvSpPr/>
+          <p:nvPr/>
+        </p:nvSpPr>
+        <p:spPr>
+          <a:xfrm>
+            <a:off x="1828806" y="1342655"/>
+            <a:ext cx="748923" cy="369332"/>
+          </a:xfrm>
+          <a:prstGeom prst="rect">
+            <a:avLst/>
+          </a:prstGeom>
+        </p:spPr>
+        <p:txBody>
+          <a:bodyPr wrap="none">
+            <a:spAutoFit/>
+          </a:bodyPr>
+          <a:lstStyle/>
+          <a:p>
+            <a:r>
+              <a:rPr lang="en-US" dirty="0"/>
+              <a:t>pa = a</a:t>
+            </a:r>
+          </a:p>
+        </p:txBody>
+      </p:sp>
+      <p:sp>
+        <p:nvSpPr>
+          <p:cNvPr id="11" name="TextBox 10"/>
+          <p:cNvSpPr txBox="1"/>
+          <p:nvPr/>
+        </p:nvSpPr>
+        <p:spPr>
+          <a:xfrm>
+            <a:off x="1628503" y="1036320"/>
+            <a:ext cx="5279972" cy="369332"/>
+          </a:xfrm>
+          <a:prstGeom prst="rect">
+            <a:avLst/>
+          </a:prstGeom>
+          <a:noFill/>
+        </p:spPr>
+        <p:txBody>
+          <a:bodyPr wrap="none" rtlCol="0">
+            <a:spAutoFit/>
+          </a:bodyPr>
+          <a:lstStyle/>
+          <a:p>
+            <a:r>
+              <a:rPr lang="en-US" dirty="0" smtClean="0"/>
+              <a:t>Con </a:t>
+            </a:r>
+            <a:r>
+              <a:rPr lang="en-US" dirty="0" err="1" smtClean="0"/>
+              <a:t>trỏ</a:t>
+            </a:r>
+            <a:r>
+              <a:rPr lang="en-US" dirty="0" smtClean="0"/>
+              <a:t> </a:t>
+            </a:r>
+            <a:r>
+              <a:rPr lang="en-US" dirty="0" err="1" smtClean="0"/>
+              <a:t>là</a:t>
+            </a:r>
+            <a:r>
+              <a:rPr lang="en-US" dirty="0" smtClean="0"/>
+              <a:t> 1 </a:t>
+            </a:r>
+            <a:r>
+              <a:rPr lang="en-US" dirty="0" err="1" smtClean="0"/>
+              <a:t>biến</a:t>
+            </a:r>
+            <a:r>
+              <a:rPr lang="en-US" dirty="0" smtClean="0"/>
+              <a:t> </a:t>
+            </a:r>
+            <a:r>
+              <a:rPr lang="en-US" dirty="0" err="1" smtClean="0"/>
+              <a:t>nên</a:t>
+            </a:r>
+            <a:r>
+              <a:rPr lang="en-US" dirty="0" smtClean="0"/>
+              <a:t> </a:t>
+            </a:r>
+            <a:r>
+              <a:rPr lang="en-US" dirty="0" err="1" smtClean="0"/>
+              <a:t>các</a:t>
+            </a:r>
+            <a:r>
+              <a:rPr lang="en-US" dirty="0" smtClean="0"/>
+              <a:t> </a:t>
+            </a:r>
+            <a:r>
+              <a:rPr lang="en-US" dirty="0" err="1" smtClean="0"/>
+              <a:t>câu</a:t>
+            </a:r>
+            <a:r>
+              <a:rPr lang="en-US" dirty="0" smtClean="0"/>
+              <a:t> </a:t>
+            </a:r>
+            <a:r>
+              <a:rPr lang="en-US" dirty="0" err="1" smtClean="0"/>
+              <a:t>lên</a:t>
+            </a:r>
+            <a:r>
+              <a:rPr lang="en-US" dirty="0" smtClean="0"/>
+              <a:t> </a:t>
+            </a:r>
+            <a:r>
+              <a:rPr lang="en-US" dirty="0" err="1" smtClean="0"/>
+              <a:t>như</a:t>
+            </a:r>
+            <a:r>
+              <a:rPr lang="en-US" dirty="0" smtClean="0"/>
+              <a:t> </a:t>
+            </a:r>
+            <a:r>
+              <a:rPr lang="en-US" dirty="0" err="1" smtClean="0"/>
+              <a:t>thế</a:t>
+            </a:r>
+            <a:r>
+              <a:rPr lang="en-US" dirty="0" smtClean="0"/>
+              <a:t> </a:t>
+            </a:r>
+            <a:r>
+              <a:rPr lang="en-US" dirty="0" err="1" smtClean="0"/>
+              <a:t>này</a:t>
+            </a:r>
+            <a:r>
+              <a:rPr lang="en-US" dirty="0" smtClean="0"/>
+              <a:t> </a:t>
+            </a:r>
+            <a:r>
+              <a:rPr lang="en-US" dirty="0" err="1" smtClean="0"/>
+              <a:t>là</a:t>
+            </a:r>
+            <a:r>
+              <a:rPr lang="en-US" dirty="0" smtClean="0"/>
+              <a:t> </a:t>
+            </a:r>
+            <a:r>
+              <a:rPr lang="en-US" dirty="0" err="1" smtClean="0"/>
+              <a:t>hơn</a:t>
+            </a:r>
+            <a:r>
+              <a:rPr lang="en-US" dirty="0" smtClean="0"/>
+              <a:t> </a:t>
+            </a:r>
+            <a:r>
+              <a:rPr lang="en-US" dirty="0" err="1" smtClean="0"/>
+              <a:t>lệ</a:t>
+            </a:r>
+            <a:endParaRPr lang="en-US" dirty="0"/>
+          </a:p>
+        </p:txBody>
+      </p:sp>
     </p:spTree>
     <p:extLst>
       <p:ext uri="{BB962C8B-B14F-4D97-AF65-F5344CB8AC3E}">
         <p14:creationId xmlns:p14="http://schemas.microsoft.com/office/powerpoint/2010/main" val="1885497735"/>
+      </p:ext>
+    </p:extLst>
+  </p:cSld>
+  <p:clrMapOvr>
+    <a:masterClrMapping/>
+  </p:clrMapOvr>
+</p:sld>
+</file>
+
+<file path=ppt/slides/slide15.xml><?xml version="1.0" encoding="utf-8"?>
+<p:sld xmlns:a="http://schemas.openxmlformats.org/drawingml/2006/main" xmlns:r="http://schemas.openxmlformats.org/officeDocument/2006/relationships" xmlns:p="http://schemas.openxmlformats.org/presentationml/2006/main">
+  <p:cSld>
+    <p:spTree>
+      <p:nvGrpSpPr>
+        <p:cNvPr id="1" name=""/>
+        <p:cNvGrpSpPr/>
+        <p:nvPr/>
+      </p:nvGrpSpPr>
+      <p:grpSpPr>
+        <a:xfrm>
+          <a:off x="0" y="0"/>
+          <a:ext cx="0" cy="0"/>
+          <a:chOff x="0" y="0"/>
+          <a:chExt cx="0" cy="0"/>
+        </a:xfrm>
+      </p:grpSpPr>
+      <p:pic>
+        <p:nvPicPr>
+          <p:cNvPr id="4" name="Picture 3"/>
+          <p:cNvPicPr>
+            <a:picLocks noChangeAspect="1"/>
+          </p:cNvPicPr>
+          <p:nvPr/>
+        </p:nvPicPr>
+        <p:blipFill>
+          <a:blip r:embed="rId2"/>
+          <a:stretch>
+            <a:fillRect/>
+          </a:stretch>
+        </p:blipFill>
+        <p:spPr>
+          <a:xfrm>
+            <a:off x="1096764" y="811610"/>
+            <a:ext cx="1533739" cy="581106"/>
+          </a:xfrm>
+          <a:prstGeom prst="rect">
+            <a:avLst/>
+          </a:prstGeom>
+        </p:spPr>
+      </p:pic>
+      <p:pic>
+        <p:nvPicPr>
+          <p:cNvPr id="5" name="Picture 4"/>
+          <p:cNvPicPr>
+            <a:picLocks noChangeAspect="1"/>
+          </p:cNvPicPr>
+          <p:nvPr/>
+        </p:nvPicPr>
+        <p:blipFill>
+          <a:blip r:embed="rId3"/>
+          <a:stretch>
+            <a:fillRect/>
+          </a:stretch>
+        </p:blipFill>
+        <p:spPr>
+          <a:xfrm>
+            <a:off x="792481" y="1274733"/>
+            <a:ext cx="5625736" cy="1230407"/>
+          </a:xfrm>
+          <a:prstGeom prst="rect">
+            <a:avLst/>
+          </a:prstGeom>
+        </p:spPr>
+      </p:pic>
+      <p:sp>
+        <p:nvSpPr>
+          <p:cNvPr id="6" name="Rectangle 5"/>
+          <p:cNvSpPr/>
+          <p:nvPr/>
+        </p:nvSpPr>
+        <p:spPr>
+          <a:xfrm>
+            <a:off x="1184366" y="2453089"/>
+            <a:ext cx="6096000" cy="646331"/>
+          </a:xfrm>
+          <a:prstGeom prst="rect">
+            <a:avLst/>
+          </a:prstGeom>
+        </p:spPr>
+        <p:txBody>
+          <a:bodyPr>
+            <a:spAutoFit/>
+          </a:bodyPr>
+          <a:lstStyle/>
+          <a:p>
+            <a:r>
+              <a:rPr lang="vi-VN" dirty="0"/>
+              <a:t>định nghĩa một mảng có kích thước là 10, nghĩa là một khối gồm 10 đối tượng liên tiếp </a:t>
+            </a:r>
+            <a:r>
+              <a:rPr lang="vi-VN" dirty="0" smtClean="0"/>
+              <a:t>nhau</a:t>
+            </a:r>
+            <a:r>
+              <a:rPr lang="en-US" dirty="0" smtClean="0"/>
+              <a:t>.</a:t>
+            </a:r>
+            <a:endParaRPr lang="en-US" dirty="0"/>
+          </a:p>
+        </p:txBody>
+      </p:sp>
+      <p:pic>
+        <p:nvPicPr>
+          <p:cNvPr id="7" name="Picture 6"/>
+          <p:cNvPicPr>
+            <a:picLocks noChangeAspect="1"/>
+          </p:cNvPicPr>
+          <p:nvPr/>
+        </p:nvPicPr>
+        <p:blipFill>
+          <a:blip r:embed="rId4"/>
+          <a:stretch>
+            <a:fillRect/>
+          </a:stretch>
+        </p:blipFill>
+        <p:spPr>
+          <a:xfrm>
+            <a:off x="711723" y="3336667"/>
+            <a:ext cx="1448002" cy="523948"/>
+          </a:xfrm>
+          <a:prstGeom prst="rect">
+            <a:avLst/>
+          </a:prstGeom>
+        </p:spPr>
+      </p:pic>
+      <p:pic>
+        <p:nvPicPr>
+          <p:cNvPr id="8" name="Picture 7"/>
+          <p:cNvPicPr>
+            <a:picLocks noChangeAspect="1"/>
+          </p:cNvPicPr>
+          <p:nvPr/>
+        </p:nvPicPr>
+        <p:blipFill>
+          <a:blip r:embed="rId5"/>
+          <a:stretch>
+            <a:fillRect/>
+          </a:stretch>
+        </p:blipFill>
+        <p:spPr>
+          <a:xfrm>
+            <a:off x="792481" y="3788310"/>
+            <a:ext cx="1457528" cy="504895"/>
+          </a:xfrm>
+          <a:prstGeom prst="rect">
+            <a:avLst/>
+          </a:prstGeom>
+        </p:spPr>
+      </p:pic>
+      <p:pic>
+        <p:nvPicPr>
+          <p:cNvPr id="9" name="Picture 8"/>
+          <p:cNvPicPr>
+            <a:picLocks noChangeAspect="1"/>
+          </p:cNvPicPr>
+          <p:nvPr/>
+        </p:nvPicPr>
+        <p:blipFill>
+          <a:blip r:embed="rId6"/>
+          <a:stretch>
+            <a:fillRect/>
+          </a:stretch>
+        </p:blipFill>
+        <p:spPr>
+          <a:xfrm>
+            <a:off x="711723" y="4454895"/>
+            <a:ext cx="5026769" cy="1545311"/>
+          </a:xfrm>
+          <a:prstGeom prst="rect">
+            <a:avLst/>
+          </a:prstGeom>
+        </p:spPr>
+      </p:pic>
+      <p:sp>
+        <p:nvSpPr>
+          <p:cNvPr id="10" name="Rectangle 1"/>
+          <p:cNvSpPr>
+            <a:spLocks noChangeArrowheads="1"/>
+          </p:cNvSpPr>
+          <p:nvPr/>
+        </p:nvSpPr>
+        <p:spPr bwMode="auto">
+          <a:xfrm>
+            <a:off x="957942" y="6181220"/>
+            <a:ext cx="6327373" cy="369332"/>
+          </a:xfrm>
+          <a:prstGeom prst="rect">
+            <a:avLst/>
+          </a:prstGeom>
+          <a:noFill/>
+          <a:ln>
+            <a:noFill/>
+          </a:ln>
+          <a:effectLst/>
+          <a:extLst>
+            <a:ext uri="{909E8E84-426E-40DD-AFC4-6F175D3DCCD1}">
+              <a14:hiddenFill xmlns:a14="http://schemas.microsoft.com/office/drawing/2010/main">
+                <a:solidFill>
+                  <a:schemeClr val="accent1"/>
+                </a:solidFill>
+              </a14:hiddenFill>
+            </a:ext>
+            <a:ext uri="{91240B29-F687-4F45-9708-019B960494DF}">
+              <a14:hiddenLine xmlns:a14="http://schemas.microsoft.com/office/drawing/2010/main" w="9525">
+                <a:solidFill>
+                  <a:schemeClr val="tx1"/>
+                </a:solidFill>
+                <a:miter lim="800000"/>
+                <a:headEnd/>
+                <a:tailEnd/>
+              </a14:hiddenLine>
+            </a:ext>
+            <a:ext uri="{AF507438-7753-43E0-B8FC-AC1667EBCBE1}">
+              <a14:hiddenEffects xmlns:a14="http://schemas.microsoft.com/office/drawing/2010/main">
+                <a:effectLst>
+                  <a:outerShdw dist="35921" dir="2700000" algn="ctr" rotWithShape="0">
+                    <a:schemeClr val="bg2"/>
+                  </a:outerShdw>
+                </a:effectLst>
+              </a14:hiddenEffects>
+            </a:ext>
+          </a:extLst>
+        </p:spPr>
+        <p:txBody>
+          <a:bodyPr vert="horz" wrap="none" lIns="91440" tIns="45720" rIns="91440" bIns="45720" numCol="1" anchor="ctr" anchorCtr="0" compatLnSpc="1">
+            <a:prstTxWarp prst="textNoShape">
+              <a:avLst/>
+            </a:prstTxWarp>
+            <a:spAutoFit/>
+          </a:bodyPr>
+          <a:lstStyle/>
+          <a:p>
+            <a:pPr marL="0" marR="0" lvl="0" indent="0" algn="l" defTabSz="914400" rtl="0" eaLnBrk="0" fontAlgn="base" latinLnBrk="0" hangingPunct="0">
+              <a:lnSpc>
+                <a:spcPct val="100000"/>
+              </a:lnSpc>
+              <a:spcBef>
+                <a:spcPct val="0"/>
+              </a:spcBef>
+              <a:spcAft>
+                <a:spcPct val="0"/>
+              </a:spcAft>
+              <a:buClrTx/>
+              <a:buSzTx/>
+              <a:buFontTx/>
+              <a:buNone/>
+              <a:tabLst/>
+            </a:pPr>
+            <a:r>
+              <a:rPr kumimoji="0" lang="en-US" altLang="en-US" sz="1800" b="1" i="0" u="none" strike="noStrike" cap="none" normalizeH="0" baseline="0" dirty="0" err="1" smtClean="0">
+                <a:ln>
+                  <a:noFill/>
+                </a:ln>
+                <a:solidFill>
+                  <a:schemeClr val="tx1"/>
+                </a:solidFill>
+                <a:effectLst/>
+                <a:latin typeface="Arial" panose="020B0604020202020204" pitchFamily="34" charset="0"/>
+              </a:rPr>
+              <a:t>tên</a:t>
+            </a:r>
+            <a:r>
+              <a:rPr kumimoji="0" lang="en-US" altLang="en-US" sz="1800" b="1" i="0" u="none" strike="noStrike" cap="none" normalizeH="0" baseline="0" dirty="0" smtClean="0">
+                <a:ln>
+                  <a:noFill/>
+                </a:ln>
+                <a:solidFill>
+                  <a:schemeClr val="tx1"/>
+                </a:solidFill>
+                <a:effectLst/>
+                <a:latin typeface="Arial" panose="020B0604020202020204" pitchFamily="34" charset="0"/>
+              </a:rPr>
+              <a:t> </a:t>
+            </a:r>
+            <a:r>
+              <a:rPr kumimoji="0" lang="en-US" altLang="en-US" sz="1800" b="1" i="0" u="none" strike="noStrike" cap="none" normalizeH="0" baseline="0" dirty="0" err="1" smtClean="0">
+                <a:ln>
+                  <a:noFill/>
+                </a:ln>
+                <a:solidFill>
+                  <a:schemeClr val="tx1"/>
+                </a:solidFill>
+                <a:effectLst/>
+                <a:latin typeface="Arial" panose="020B0604020202020204" pitchFamily="34" charset="0"/>
+              </a:rPr>
+              <a:t>mảng</a:t>
+            </a:r>
+            <a:r>
+              <a:rPr kumimoji="0" lang="en-US" altLang="en-US" sz="1800" b="1" i="0" u="none" strike="noStrike" cap="none" normalizeH="0" baseline="0" dirty="0" smtClean="0">
+                <a:ln>
+                  <a:noFill/>
+                </a:ln>
+                <a:solidFill>
+                  <a:schemeClr val="tx1"/>
+                </a:solidFill>
+                <a:effectLst/>
+                <a:latin typeface="Arial" panose="020B0604020202020204" pitchFamily="34" charset="0"/>
+              </a:rPr>
+              <a:t> </a:t>
+            </a:r>
+            <a:r>
+              <a:rPr kumimoji="0" lang="en-US" altLang="en-US" sz="1800" b="1" i="0" u="none" strike="noStrike" cap="none" normalizeH="0" baseline="0" dirty="0" err="1" smtClean="0">
+                <a:ln>
+                  <a:noFill/>
+                </a:ln>
+                <a:solidFill>
+                  <a:schemeClr val="tx1"/>
+                </a:solidFill>
+                <a:effectLst/>
+                <a:latin typeface="Arial" panose="020B0604020202020204" pitchFamily="34" charset="0"/>
+              </a:rPr>
+              <a:t>không</a:t>
+            </a:r>
+            <a:r>
+              <a:rPr kumimoji="0" lang="en-US" altLang="en-US" sz="1800" b="1" i="0" u="none" strike="noStrike" cap="none" normalizeH="0" baseline="0" dirty="0" smtClean="0">
+                <a:ln>
+                  <a:noFill/>
+                </a:ln>
+                <a:solidFill>
+                  <a:schemeClr val="tx1"/>
+                </a:solidFill>
+                <a:effectLst/>
+                <a:latin typeface="Arial" panose="020B0604020202020204" pitchFamily="34" charset="0"/>
+              </a:rPr>
+              <a:t> </a:t>
+            </a:r>
+            <a:r>
+              <a:rPr kumimoji="0" lang="en-US" altLang="en-US" sz="1800" b="1" i="0" u="none" strike="noStrike" cap="none" normalizeH="0" baseline="0" dirty="0" err="1" smtClean="0">
+                <a:ln>
+                  <a:noFill/>
+                </a:ln>
+                <a:solidFill>
+                  <a:schemeClr val="tx1"/>
+                </a:solidFill>
+                <a:effectLst/>
+                <a:latin typeface="Arial" panose="020B0604020202020204" pitchFamily="34" charset="0"/>
+              </a:rPr>
+              <a:t>phải</a:t>
+            </a:r>
+            <a:r>
+              <a:rPr kumimoji="0" lang="en-US" altLang="en-US" sz="1800" b="1" i="0" u="none" strike="noStrike" cap="none" normalizeH="0" baseline="0" dirty="0" smtClean="0">
+                <a:ln>
+                  <a:noFill/>
+                </a:ln>
+                <a:solidFill>
+                  <a:schemeClr val="tx1"/>
+                </a:solidFill>
+                <a:effectLst/>
+                <a:latin typeface="Arial" panose="020B0604020202020204" pitchFamily="34" charset="0"/>
+              </a:rPr>
+              <a:t> </a:t>
+            </a:r>
+            <a:r>
+              <a:rPr kumimoji="0" lang="en-US" altLang="en-US" sz="1800" b="1" i="0" u="none" strike="noStrike" cap="none" normalizeH="0" baseline="0" dirty="0" err="1" smtClean="0">
+                <a:ln>
+                  <a:noFill/>
+                </a:ln>
+                <a:solidFill>
+                  <a:schemeClr val="tx1"/>
+                </a:solidFill>
+                <a:effectLst/>
+                <a:latin typeface="Arial" panose="020B0604020202020204" pitchFamily="34" charset="0"/>
+              </a:rPr>
+              <a:t>là</a:t>
+            </a:r>
+            <a:r>
+              <a:rPr kumimoji="0" lang="en-US" altLang="en-US" sz="1800" b="1" i="0" u="none" strike="noStrike" cap="none" normalizeH="0" baseline="0" dirty="0" smtClean="0">
+                <a:ln>
+                  <a:noFill/>
+                </a:ln>
+                <a:solidFill>
+                  <a:schemeClr val="tx1"/>
+                </a:solidFill>
+                <a:effectLst/>
+                <a:latin typeface="Arial" panose="020B0604020202020204" pitchFamily="34" charset="0"/>
+              </a:rPr>
+              <a:t> </a:t>
+            </a:r>
+            <a:r>
+              <a:rPr kumimoji="0" lang="en-US" altLang="en-US" sz="1800" b="1" i="0" u="none" strike="noStrike" cap="none" normalizeH="0" baseline="0" dirty="0" err="1" smtClean="0">
+                <a:ln>
+                  <a:noFill/>
+                </a:ln>
+                <a:solidFill>
+                  <a:schemeClr val="tx1"/>
+                </a:solidFill>
+                <a:effectLst/>
+                <a:latin typeface="Arial" panose="020B0604020202020204" pitchFamily="34" charset="0"/>
+              </a:rPr>
+              <a:t>một</a:t>
+            </a:r>
+            <a:r>
+              <a:rPr kumimoji="0" lang="en-US" altLang="en-US" sz="1800" b="1" i="0" u="none" strike="noStrike" cap="none" normalizeH="0" baseline="0" dirty="0" smtClean="0">
+                <a:ln>
+                  <a:noFill/>
+                </a:ln>
+                <a:solidFill>
+                  <a:schemeClr val="tx1"/>
+                </a:solidFill>
+                <a:effectLst/>
+                <a:latin typeface="Arial" panose="020B0604020202020204" pitchFamily="34" charset="0"/>
+              </a:rPr>
+              <a:t> </a:t>
+            </a:r>
+            <a:r>
+              <a:rPr kumimoji="0" lang="en-US" altLang="en-US" sz="1800" b="1" i="0" u="none" strike="noStrike" cap="none" normalizeH="0" baseline="0" dirty="0" err="1" smtClean="0">
+                <a:ln>
+                  <a:noFill/>
+                </a:ln>
+                <a:solidFill>
+                  <a:schemeClr val="tx1"/>
+                </a:solidFill>
+                <a:effectLst/>
+                <a:latin typeface="Arial" panose="020B0604020202020204" pitchFamily="34" charset="0"/>
+              </a:rPr>
+              <a:t>biến</a:t>
+            </a:r>
+            <a:r>
+              <a:rPr kumimoji="0" lang="en-US" altLang="en-US" sz="1800" b="0" i="0" u="none" strike="noStrike" cap="none" normalizeH="0" baseline="0" dirty="0" smtClean="0">
+                <a:ln>
+                  <a:noFill/>
+                </a:ln>
+                <a:solidFill>
+                  <a:schemeClr val="tx1"/>
+                </a:solidFill>
+                <a:effectLst/>
+                <a:latin typeface="Arial" panose="020B0604020202020204" pitchFamily="34" charset="0"/>
+              </a:rPr>
+              <a:t>; </a:t>
+            </a:r>
+            <a:r>
+              <a:rPr kumimoji="0" lang="en-US" altLang="en-US" sz="1800" b="0" i="0" u="none" strike="noStrike" cap="none" normalizeH="0" baseline="0" dirty="0" err="1" smtClean="0">
+                <a:ln>
+                  <a:noFill/>
+                </a:ln>
+                <a:solidFill>
+                  <a:schemeClr val="tx1"/>
+                </a:solidFill>
+                <a:effectLst/>
+                <a:latin typeface="Arial" panose="020B0604020202020204" pitchFamily="34" charset="0"/>
+              </a:rPr>
+              <a:t>các</a:t>
+            </a:r>
+            <a:r>
+              <a:rPr kumimoji="0" lang="en-US" altLang="en-US" sz="1800" b="0" i="0" u="none" strike="noStrike" cap="none" normalizeH="0" baseline="0" dirty="0" smtClean="0">
+                <a:ln>
+                  <a:noFill/>
+                </a:ln>
+                <a:solidFill>
+                  <a:schemeClr val="tx1"/>
+                </a:solidFill>
+                <a:effectLst/>
+                <a:latin typeface="Arial" panose="020B0604020202020204" pitchFamily="34" charset="0"/>
+              </a:rPr>
+              <a:t> </a:t>
+            </a:r>
+            <a:r>
+              <a:rPr kumimoji="0" lang="en-US" altLang="en-US" sz="1800" b="0" i="0" u="none" strike="noStrike" cap="none" normalizeH="0" baseline="0" dirty="0" err="1" smtClean="0">
+                <a:ln>
+                  <a:noFill/>
+                </a:ln>
+                <a:solidFill>
+                  <a:schemeClr val="tx1"/>
+                </a:solidFill>
+                <a:effectLst/>
+                <a:latin typeface="Arial" panose="020B0604020202020204" pitchFamily="34" charset="0"/>
+              </a:rPr>
+              <a:t>cấu</a:t>
+            </a:r>
+            <a:r>
+              <a:rPr kumimoji="0" lang="en-US" altLang="en-US" sz="1800" b="0" i="0" u="none" strike="noStrike" cap="none" normalizeH="0" baseline="0" dirty="0" smtClean="0">
+                <a:ln>
+                  <a:noFill/>
+                </a:ln>
+                <a:solidFill>
+                  <a:schemeClr val="tx1"/>
+                </a:solidFill>
+                <a:effectLst/>
+                <a:latin typeface="Arial" panose="020B0604020202020204" pitchFamily="34" charset="0"/>
+              </a:rPr>
+              <a:t> </a:t>
+            </a:r>
+            <a:r>
+              <a:rPr kumimoji="0" lang="en-US" altLang="en-US" sz="1800" b="0" i="0" u="none" strike="noStrike" cap="none" normalizeH="0" baseline="0" dirty="0" err="1" smtClean="0">
+                <a:ln>
+                  <a:noFill/>
+                </a:ln>
+                <a:solidFill>
+                  <a:schemeClr val="tx1"/>
+                </a:solidFill>
+                <a:effectLst/>
+                <a:latin typeface="Arial" panose="020B0604020202020204" pitchFamily="34" charset="0"/>
+              </a:rPr>
+              <a:t>trúc</a:t>
+            </a:r>
+            <a:r>
+              <a:rPr kumimoji="0" lang="en-US" altLang="en-US" sz="1800" b="0" i="0" u="none" strike="noStrike" cap="none" normalizeH="0" baseline="0" dirty="0" smtClean="0">
+                <a:ln>
+                  <a:noFill/>
+                </a:ln>
+                <a:solidFill>
+                  <a:schemeClr val="tx1"/>
+                </a:solidFill>
+                <a:effectLst/>
+                <a:latin typeface="Arial" panose="020B0604020202020204" pitchFamily="34" charset="0"/>
+              </a:rPr>
+              <a:t> </a:t>
+            </a:r>
+            <a:r>
+              <a:rPr kumimoji="0" lang="en-US" altLang="en-US" sz="1800" b="0" i="0" u="none" strike="noStrike" cap="none" normalizeH="0" baseline="0" dirty="0" err="1" smtClean="0">
+                <a:ln>
+                  <a:noFill/>
+                </a:ln>
+                <a:solidFill>
+                  <a:schemeClr val="tx1"/>
+                </a:solidFill>
+                <a:effectLst/>
+                <a:latin typeface="Arial" panose="020B0604020202020204" pitchFamily="34" charset="0"/>
+              </a:rPr>
+              <a:t>lệnh</a:t>
+            </a:r>
+            <a:r>
+              <a:rPr kumimoji="0" lang="en-US" altLang="en-US" sz="1800" b="0" i="0" u="none" strike="noStrike" cap="none" normalizeH="0" baseline="0" dirty="0" smtClean="0">
+                <a:ln>
+                  <a:noFill/>
+                </a:ln>
+                <a:solidFill>
+                  <a:schemeClr val="tx1"/>
+                </a:solidFill>
+                <a:effectLst/>
+                <a:latin typeface="Arial" panose="020B0604020202020204" pitchFamily="34" charset="0"/>
+              </a:rPr>
+              <a:t> </a:t>
+            </a:r>
+            <a:r>
+              <a:rPr kumimoji="0" lang="en-US" altLang="en-US" sz="1800" b="0" i="0" u="none" strike="noStrike" cap="none" normalizeH="0" baseline="0" dirty="0" err="1" smtClean="0">
+                <a:ln>
+                  <a:noFill/>
+                </a:ln>
+                <a:solidFill>
+                  <a:schemeClr val="tx1"/>
+                </a:solidFill>
+                <a:effectLst/>
+                <a:latin typeface="Arial" panose="020B0604020202020204" pitchFamily="34" charset="0"/>
+              </a:rPr>
+              <a:t>như</a:t>
+            </a:r>
+            <a:r>
+              <a:rPr kumimoji="0" lang="en-US" altLang="en-US" sz="1800" b="0" i="0" u="none" strike="noStrike" cap="none" normalizeH="0" baseline="0" dirty="0" smtClean="0">
+                <a:ln>
+                  <a:noFill/>
+                </a:ln>
+                <a:solidFill>
+                  <a:schemeClr val="tx1"/>
+                </a:solidFill>
+                <a:effectLst/>
+                <a:latin typeface="Arial" panose="020B0604020202020204" pitchFamily="34" charset="0"/>
+              </a:rPr>
+              <a:t> </a:t>
+            </a:r>
+            <a:r>
+              <a:rPr kumimoji="0" lang="en-US" altLang="en-US" sz="800" b="0" i="0" u="none" strike="noStrike" cap="none" normalizeH="0" baseline="0" dirty="0" smtClean="0">
+                <a:ln>
+                  <a:noFill/>
+                </a:ln>
+                <a:solidFill>
+                  <a:schemeClr val="tx1"/>
+                </a:solidFill>
+                <a:effectLst/>
+              </a:rPr>
+              <a:t> </a:t>
+            </a:r>
+            <a:endParaRPr kumimoji="0" lang="en-US" altLang="en-US" sz="1800" b="0" i="0" u="none" strike="noStrike" cap="none" normalizeH="0" baseline="0" dirty="0" smtClean="0">
+              <a:ln>
+                <a:noFill/>
+              </a:ln>
+              <a:solidFill>
+                <a:schemeClr val="tx1"/>
+              </a:solidFill>
+              <a:effectLst/>
+              <a:latin typeface="Arial" panose="020B0604020202020204" pitchFamily="34" charset="0"/>
+            </a:endParaRPr>
+          </a:p>
+        </p:txBody>
+      </p:sp>
+      <p:sp>
+        <p:nvSpPr>
+          <p:cNvPr id="11" name="TextBox 10"/>
+          <p:cNvSpPr txBox="1"/>
+          <p:nvPr/>
+        </p:nvSpPr>
+        <p:spPr>
+          <a:xfrm>
+            <a:off x="7280366" y="6287589"/>
+            <a:ext cx="748923" cy="369332"/>
+          </a:xfrm>
+          <a:prstGeom prst="rect">
+            <a:avLst/>
+          </a:prstGeom>
+          <a:noFill/>
+        </p:spPr>
+        <p:txBody>
+          <a:bodyPr wrap="none" rtlCol="0">
+            <a:spAutoFit/>
+          </a:bodyPr>
+          <a:lstStyle/>
+          <a:p>
+            <a:r>
+              <a:rPr lang="en-US" dirty="0" smtClean="0"/>
+              <a:t>a = pa</a:t>
+            </a:r>
+            <a:endParaRPr lang="en-US" dirty="0"/>
+          </a:p>
+        </p:txBody>
+      </p:sp>
+      <p:sp>
+        <p:nvSpPr>
+          <p:cNvPr id="12" name="TextBox 11"/>
+          <p:cNvSpPr txBox="1"/>
+          <p:nvPr/>
+        </p:nvSpPr>
+        <p:spPr>
+          <a:xfrm>
+            <a:off x="8029289" y="6278801"/>
+            <a:ext cx="527773" cy="369332"/>
+          </a:xfrm>
+          <a:prstGeom prst="rect">
+            <a:avLst/>
+          </a:prstGeom>
+          <a:noFill/>
+        </p:spPr>
+        <p:txBody>
+          <a:bodyPr wrap="none" rtlCol="0">
+            <a:spAutoFit/>
+          </a:bodyPr>
+          <a:lstStyle/>
+          <a:p>
+            <a:r>
+              <a:rPr lang="en-US" dirty="0"/>
+              <a:t>a</a:t>
+            </a:r>
+            <a:r>
+              <a:rPr lang="en-US" dirty="0" smtClean="0"/>
+              <a:t>++</a:t>
+            </a:r>
+            <a:endParaRPr lang="en-US" dirty="0"/>
+          </a:p>
+        </p:txBody>
+      </p:sp>
+      <p:sp>
+        <p:nvSpPr>
+          <p:cNvPr id="13" name="TextBox 12"/>
+          <p:cNvSpPr txBox="1"/>
+          <p:nvPr/>
+        </p:nvSpPr>
+        <p:spPr>
+          <a:xfrm>
+            <a:off x="8778212" y="6287589"/>
+            <a:ext cx="1630575" cy="369332"/>
+          </a:xfrm>
+          <a:prstGeom prst="rect">
+            <a:avLst/>
+          </a:prstGeom>
+          <a:noFill/>
+        </p:spPr>
+        <p:txBody>
+          <a:bodyPr wrap="none" rtlCol="0">
+            <a:spAutoFit/>
+          </a:bodyPr>
+          <a:lstStyle/>
+          <a:p>
+            <a:r>
+              <a:rPr lang="en-US" dirty="0" err="1"/>
+              <a:t>l</a:t>
+            </a:r>
+            <a:r>
+              <a:rPr lang="en-US" dirty="0" err="1" smtClean="0"/>
+              <a:t>à</a:t>
+            </a:r>
+            <a:r>
+              <a:rPr lang="en-US" dirty="0" smtClean="0"/>
+              <a:t> </a:t>
+            </a:r>
+            <a:r>
+              <a:rPr lang="en-US" dirty="0" err="1" smtClean="0"/>
+              <a:t>không</a:t>
+            </a:r>
+            <a:r>
+              <a:rPr lang="en-US" dirty="0" smtClean="0"/>
+              <a:t> </a:t>
+            </a:r>
+            <a:r>
+              <a:rPr lang="en-US" dirty="0" err="1" smtClean="0"/>
+              <a:t>hợp</a:t>
+            </a:r>
+            <a:r>
+              <a:rPr lang="en-US" dirty="0" smtClean="0"/>
+              <a:t> </a:t>
+            </a:r>
+            <a:r>
+              <a:rPr lang="en-US" dirty="0" err="1" smtClean="0"/>
+              <a:t>lệ</a:t>
+            </a:r>
+            <a:endParaRPr lang="en-US" dirty="0"/>
+          </a:p>
+        </p:txBody>
+      </p:sp>
+    </p:spTree>
+    <p:extLst>
+      <p:ext uri="{BB962C8B-B14F-4D97-AF65-F5344CB8AC3E}">
+        <p14:creationId xmlns:p14="http://schemas.microsoft.com/office/powerpoint/2010/main" val="2956981728"/>
+      </p:ext>
+    </p:extLst>
+  </p:cSld>
+  <p:clrMapOvr>
+    <a:masterClrMapping/>
+  </p:clrMapOvr>
+</p:sld>
+</file>
+
+<file path=ppt/slides/slide16.xml><?xml version="1.0" encoding="utf-8"?>
+<p:sld xmlns:a="http://schemas.openxmlformats.org/drawingml/2006/main" xmlns:r="http://schemas.openxmlformats.org/officeDocument/2006/relationships" xmlns:p="http://schemas.openxmlformats.org/presentationml/2006/main">
+  <p:cSld>
+    <p:spTree>
+      <p:nvGrpSpPr>
+        <p:cNvPr id="1" name=""/>
+        <p:cNvGrpSpPr/>
+        <p:nvPr/>
+      </p:nvGrpSpPr>
+      <p:grpSpPr>
+        <a:xfrm>
+          <a:off x="0" y="0"/>
+          <a:ext cx="0" cy="0"/>
+          <a:chOff x="0" y="0"/>
+          <a:chExt cx="0" cy="0"/>
+        </a:xfrm>
+      </p:grpSpPr>
+      <p:sp>
+        <p:nvSpPr>
+          <p:cNvPr id="4" name="TextBox 3"/>
+          <p:cNvSpPr txBox="1"/>
+          <p:nvPr/>
+        </p:nvSpPr>
+        <p:spPr>
+          <a:xfrm>
+            <a:off x="1584960" y="609600"/>
+            <a:ext cx="8679556" cy="646331"/>
+          </a:xfrm>
+          <a:prstGeom prst="rect">
+            <a:avLst/>
+          </a:prstGeom>
+          <a:noFill/>
+        </p:spPr>
+        <p:txBody>
+          <a:bodyPr wrap="none" rtlCol="0">
+            <a:spAutoFit/>
+          </a:bodyPr>
+          <a:lstStyle/>
+          <a:p>
+            <a:r>
+              <a:rPr lang="en-US" dirty="0" err="1" smtClean="0"/>
+              <a:t>Khi</a:t>
+            </a:r>
+            <a:r>
+              <a:rPr lang="en-US" dirty="0" smtClean="0"/>
+              <a:t> </a:t>
+            </a:r>
+            <a:r>
+              <a:rPr lang="en-US" dirty="0" err="1" smtClean="0"/>
+              <a:t>tên</a:t>
+            </a:r>
+            <a:r>
+              <a:rPr lang="en-US" dirty="0" smtClean="0"/>
+              <a:t> </a:t>
+            </a:r>
+            <a:r>
+              <a:rPr lang="en-US" dirty="0" err="1" smtClean="0"/>
+              <a:t>mảng</a:t>
+            </a:r>
+            <a:r>
+              <a:rPr lang="en-US" dirty="0" smtClean="0"/>
+              <a:t> </a:t>
+            </a:r>
+            <a:r>
+              <a:rPr lang="en-US" dirty="0" err="1" smtClean="0"/>
+              <a:t>được</a:t>
+            </a:r>
+            <a:r>
+              <a:rPr lang="en-US" dirty="0" smtClean="0"/>
+              <a:t> </a:t>
+            </a:r>
+            <a:r>
+              <a:rPr lang="en-US" dirty="0" err="1" smtClean="0"/>
+              <a:t>truyền</a:t>
+            </a:r>
+            <a:r>
+              <a:rPr lang="en-US" dirty="0" smtClean="0"/>
+              <a:t> </a:t>
+            </a:r>
+            <a:r>
+              <a:rPr lang="en-US" dirty="0" err="1" smtClean="0"/>
+              <a:t>vào</a:t>
+            </a:r>
+            <a:r>
+              <a:rPr lang="en-US" dirty="0" smtClean="0"/>
+              <a:t> </a:t>
+            </a:r>
+            <a:r>
+              <a:rPr lang="en-US" dirty="0" err="1" smtClean="0"/>
+              <a:t>hàm</a:t>
+            </a:r>
+            <a:r>
+              <a:rPr lang="en-US" dirty="0" smtClean="0"/>
+              <a:t>, </a:t>
+            </a:r>
+            <a:r>
+              <a:rPr lang="en-US" dirty="0" err="1" smtClean="0"/>
+              <a:t>thứ</a:t>
+            </a:r>
+            <a:r>
+              <a:rPr lang="en-US" dirty="0" smtClean="0"/>
+              <a:t> </a:t>
+            </a:r>
+            <a:r>
+              <a:rPr lang="en-US" dirty="0" err="1" smtClean="0"/>
+              <a:t>thật</a:t>
+            </a:r>
+            <a:r>
+              <a:rPr lang="en-US" dirty="0" smtClean="0"/>
+              <a:t> </a:t>
+            </a:r>
+            <a:r>
+              <a:rPr lang="en-US" dirty="0" err="1" smtClean="0"/>
+              <a:t>sự</a:t>
+            </a:r>
+            <a:r>
+              <a:rPr lang="en-US" dirty="0" smtClean="0"/>
+              <a:t> </a:t>
+            </a:r>
+            <a:r>
+              <a:rPr lang="en-US" dirty="0" err="1" smtClean="0"/>
+              <a:t>truyền</a:t>
+            </a:r>
+            <a:r>
+              <a:rPr lang="en-US" dirty="0" smtClean="0"/>
+              <a:t> </a:t>
+            </a:r>
+            <a:r>
+              <a:rPr lang="en-US" dirty="0" err="1" smtClean="0"/>
+              <a:t>vào</a:t>
+            </a:r>
+            <a:r>
+              <a:rPr lang="en-US" dirty="0" smtClean="0"/>
+              <a:t> </a:t>
+            </a:r>
+            <a:r>
+              <a:rPr lang="en-US" dirty="0" err="1" smtClean="0"/>
+              <a:t>là</a:t>
+            </a:r>
+            <a:r>
+              <a:rPr lang="en-US" dirty="0" smtClean="0"/>
+              <a:t> </a:t>
+            </a:r>
+            <a:r>
+              <a:rPr lang="en-US" dirty="0" err="1" smtClean="0"/>
+              <a:t>địa</a:t>
+            </a:r>
+            <a:r>
+              <a:rPr lang="en-US" dirty="0" smtClean="0"/>
+              <a:t> </a:t>
+            </a:r>
+            <a:r>
+              <a:rPr lang="en-US" dirty="0" err="1" smtClean="0"/>
+              <a:t>chỉ</a:t>
+            </a:r>
+            <a:r>
+              <a:rPr lang="en-US" dirty="0" smtClean="0"/>
+              <a:t> </a:t>
+            </a:r>
+            <a:r>
+              <a:rPr lang="en-US" dirty="0" err="1" smtClean="0"/>
+              <a:t>của</a:t>
+            </a:r>
+            <a:r>
+              <a:rPr lang="en-US" dirty="0" smtClean="0"/>
+              <a:t> </a:t>
+            </a:r>
+            <a:r>
+              <a:rPr lang="en-US" dirty="0" err="1" smtClean="0"/>
+              <a:t>phần</a:t>
+            </a:r>
+            <a:r>
+              <a:rPr lang="en-US" dirty="0" smtClean="0"/>
+              <a:t> </a:t>
+            </a:r>
+            <a:r>
+              <a:rPr lang="en-US" dirty="0" err="1" smtClean="0"/>
+              <a:t>tử</a:t>
+            </a:r>
+            <a:r>
+              <a:rPr lang="en-US" dirty="0" smtClean="0"/>
+              <a:t> </a:t>
+            </a:r>
+            <a:r>
+              <a:rPr lang="en-US" dirty="0" err="1" smtClean="0"/>
+              <a:t>đầu</a:t>
+            </a:r>
+            <a:r>
+              <a:rPr lang="en-US" dirty="0" smtClean="0"/>
+              <a:t> </a:t>
+            </a:r>
+            <a:r>
+              <a:rPr lang="en-US" dirty="0" err="1" smtClean="0"/>
+              <a:t>tiên</a:t>
+            </a:r>
+            <a:r>
+              <a:rPr lang="en-US" dirty="0" smtClean="0"/>
+              <a:t>.</a:t>
+            </a:r>
+          </a:p>
+          <a:p>
+            <a:endParaRPr lang="en-US" dirty="0"/>
+          </a:p>
+        </p:txBody>
+      </p:sp>
+    </p:spTree>
+    <p:extLst>
+      <p:ext uri="{BB962C8B-B14F-4D97-AF65-F5344CB8AC3E}">
+        <p14:creationId xmlns:p14="http://schemas.microsoft.com/office/powerpoint/2010/main" val="1345756731"/>
+      </p:ext>
+    </p:extLst>
+  </p:cSld>
+  <p:clrMapOvr>
+    <a:masterClrMapping/>
+  </p:clrMapOvr>
+</p:sld>
+</file>
+
+<file path=ppt/slides/slide17.xml><?xml version="1.0" encoding="utf-8"?>
+<p:sld xmlns:a="http://schemas.openxmlformats.org/drawingml/2006/main" xmlns:r="http://schemas.openxmlformats.org/officeDocument/2006/relationships" xmlns:p="http://schemas.openxmlformats.org/presentationml/2006/main">
+  <p:cSld>
+    <p:spTree>
+      <p:nvGrpSpPr>
+        <p:cNvPr id="1" name=""/>
+        <p:cNvGrpSpPr/>
+        <p:nvPr/>
+      </p:nvGrpSpPr>
+      <p:grpSpPr>
+        <a:xfrm>
+          <a:off x="0" y="0"/>
+          <a:ext cx="0" cy="0"/>
+          <a:chOff x="0" y="0"/>
+          <a:chExt cx="0" cy="0"/>
+        </a:xfrm>
+      </p:grpSpPr>
+      <p:sp>
+        <p:nvSpPr>
+          <p:cNvPr id="4" name="Rectangle 3"/>
+          <p:cNvSpPr/>
+          <p:nvPr/>
+        </p:nvSpPr>
+        <p:spPr>
+          <a:xfrm>
+            <a:off x="1509685" y="1328449"/>
+            <a:ext cx="7263463" cy="369332"/>
+          </a:xfrm>
+          <a:prstGeom prst="rect">
+            <a:avLst/>
+          </a:prstGeom>
+        </p:spPr>
+        <p:txBody>
+          <a:bodyPr wrap="none">
+            <a:spAutoFit/>
+          </a:bodyPr>
+          <a:lstStyle/>
+          <a:p>
+            <a:r>
+              <a:rPr lang="en-US" dirty="0" err="1"/>
+              <a:t>Một</a:t>
+            </a:r>
+            <a:r>
+              <a:rPr lang="en-US" dirty="0"/>
+              <a:t> </a:t>
+            </a:r>
+            <a:r>
+              <a:rPr lang="en-US" dirty="0" err="1"/>
+              <a:t>hằng</a:t>
+            </a:r>
+            <a:r>
+              <a:rPr lang="en-US" dirty="0"/>
+              <a:t> </a:t>
+            </a:r>
+            <a:r>
+              <a:rPr lang="en-US" dirty="0" err="1" smtClean="0"/>
+              <a:t>chuỗi</a:t>
+            </a:r>
+            <a:r>
+              <a:rPr lang="en-US" dirty="0" smtClean="0"/>
+              <a:t> </a:t>
+            </a:r>
+            <a:r>
+              <a:rPr lang="en-US" dirty="0" err="1" smtClean="0"/>
+              <a:t>thức</a:t>
+            </a:r>
+            <a:r>
+              <a:rPr lang="en-US" dirty="0" smtClean="0"/>
+              <a:t> </a:t>
+            </a:r>
+            <a:r>
+              <a:rPr lang="en-US" dirty="0" err="1" smtClean="0"/>
+              <a:t>chất</a:t>
+            </a:r>
+            <a:r>
+              <a:rPr lang="en-US" dirty="0" smtClean="0"/>
+              <a:t> </a:t>
+            </a:r>
+            <a:r>
+              <a:rPr lang="en-US" dirty="0" err="1" smtClean="0"/>
+              <a:t>là</a:t>
+            </a:r>
+            <a:r>
+              <a:rPr lang="en-US" dirty="0" smtClean="0"/>
+              <a:t> 1 </a:t>
+            </a:r>
+            <a:r>
+              <a:rPr lang="en-US" dirty="0" err="1" smtClean="0"/>
+              <a:t>mảng</a:t>
+            </a:r>
+            <a:r>
+              <a:rPr lang="en-US" dirty="0" smtClean="0"/>
+              <a:t> </a:t>
+            </a:r>
+            <a:r>
+              <a:rPr lang="en-US" dirty="0" err="1" smtClean="0"/>
+              <a:t>các</a:t>
+            </a:r>
+            <a:r>
+              <a:rPr lang="en-US" dirty="0" smtClean="0"/>
+              <a:t> </a:t>
+            </a:r>
+            <a:r>
+              <a:rPr lang="en-US" dirty="0" err="1" smtClean="0"/>
+              <a:t>kí</a:t>
+            </a:r>
+            <a:r>
+              <a:rPr lang="en-US" dirty="0" smtClean="0"/>
+              <a:t> </a:t>
+            </a:r>
+            <a:r>
+              <a:rPr lang="en-US" dirty="0" err="1" smtClean="0"/>
+              <a:t>tự</a:t>
+            </a:r>
+            <a:r>
+              <a:rPr lang="en-US" dirty="0" smtClean="0"/>
+              <a:t> </a:t>
+            </a:r>
+            <a:r>
+              <a:rPr lang="en-US" dirty="0" err="1" smtClean="0"/>
+              <a:t>và</a:t>
+            </a:r>
+            <a:r>
+              <a:rPr lang="en-US" dirty="0" smtClean="0"/>
+              <a:t> </a:t>
+            </a:r>
+            <a:r>
+              <a:rPr lang="en-US" dirty="0" err="1" smtClean="0"/>
+              <a:t>kết</a:t>
+            </a:r>
+            <a:r>
+              <a:rPr lang="en-US" dirty="0" smtClean="0"/>
+              <a:t> </a:t>
+            </a:r>
+            <a:r>
+              <a:rPr lang="en-US" dirty="0" err="1" smtClean="0"/>
+              <a:t>thúc</a:t>
+            </a:r>
+            <a:r>
+              <a:rPr lang="en-US" dirty="0" smtClean="0"/>
+              <a:t> </a:t>
+            </a:r>
+            <a:r>
+              <a:rPr lang="en-US" dirty="0" err="1" smtClean="0"/>
+              <a:t>bằng</a:t>
+            </a:r>
+            <a:r>
+              <a:rPr lang="en-US" dirty="0" smtClean="0"/>
+              <a:t> </a:t>
+            </a:r>
+            <a:r>
+              <a:rPr lang="en-US" dirty="0" err="1" smtClean="0"/>
+              <a:t>kí</a:t>
+            </a:r>
+            <a:r>
+              <a:rPr lang="en-US" dirty="0" smtClean="0"/>
+              <a:t> </a:t>
+            </a:r>
+            <a:r>
+              <a:rPr lang="en-US" dirty="0" err="1" smtClean="0"/>
+              <a:t>tự</a:t>
+            </a:r>
+            <a:r>
+              <a:rPr lang="en-US" dirty="0" smtClean="0"/>
+              <a:t> null ‘\0’</a:t>
+            </a:r>
+            <a:endParaRPr lang="en-US" dirty="0"/>
+          </a:p>
+        </p:txBody>
+      </p:sp>
+      <p:pic>
+        <p:nvPicPr>
+          <p:cNvPr id="5" name="Picture 4"/>
+          <p:cNvPicPr>
+            <a:picLocks noChangeAspect="1"/>
+          </p:cNvPicPr>
+          <p:nvPr/>
+        </p:nvPicPr>
+        <p:blipFill>
+          <a:blip r:embed="rId2"/>
+          <a:stretch>
+            <a:fillRect/>
+          </a:stretch>
+        </p:blipFill>
+        <p:spPr>
+          <a:xfrm>
+            <a:off x="1878030" y="2105785"/>
+            <a:ext cx="6258798" cy="800212"/>
+          </a:xfrm>
+          <a:prstGeom prst="rect">
+            <a:avLst/>
+          </a:prstGeom>
+        </p:spPr>
+      </p:pic>
+      <p:sp>
+        <p:nvSpPr>
+          <p:cNvPr id="6" name="Rectangle 5"/>
+          <p:cNvSpPr/>
+          <p:nvPr/>
+        </p:nvSpPr>
+        <p:spPr>
+          <a:xfrm>
+            <a:off x="1635896" y="2905997"/>
+            <a:ext cx="6396366" cy="369332"/>
+          </a:xfrm>
+          <a:prstGeom prst="rect">
+            <a:avLst/>
+          </a:prstGeom>
+        </p:spPr>
+        <p:txBody>
+          <a:bodyPr wrap="none">
+            <a:spAutoFit/>
+          </a:bodyPr>
+          <a:lstStyle/>
+          <a:p>
+            <a:r>
+              <a:rPr lang="en-US" dirty="0" err="1"/>
+              <a:t>Có</a:t>
+            </a:r>
+            <a:r>
+              <a:rPr lang="en-US" dirty="0"/>
+              <a:t> </a:t>
+            </a:r>
+            <a:r>
+              <a:rPr lang="en-US" dirty="0" err="1"/>
+              <a:t>một</a:t>
+            </a:r>
+            <a:r>
+              <a:rPr lang="en-US" dirty="0"/>
+              <a:t> </a:t>
+            </a:r>
+            <a:r>
+              <a:rPr lang="en-US" dirty="0" err="1"/>
+              <a:t>điểm</a:t>
+            </a:r>
+            <a:r>
+              <a:rPr lang="en-US" dirty="0"/>
+              <a:t> </a:t>
+            </a:r>
+            <a:r>
+              <a:rPr lang="en-US" dirty="0" err="1"/>
+              <a:t>khác</a:t>
+            </a:r>
+            <a:r>
+              <a:rPr lang="en-US" dirty="0"/>
+              <a:t> </a:t>
+            </a:r>
+            <a:r>
+              <a:rPr lang="en-US" dirty="0" err="1"/>
+              <a:t>biệt</a:t>
+            </a:r>
+            <a:r>
+              <a:rPr lang="en-US" dirty="0"/>
+              <a:t> </a:t>
+            </a:r>
+            <a:r>
+              <a:rPr lang="en-US" dirty="0" err="1"/>
+              <a:t>cực</a:t>
+            </a:r>
+            <a:r>
+              <a:rPr lang="en-US" dirty="0"/>
+              <a:t> </a:t>
+            </a:r>
+            <a:r>
+              <a:rPr lang="en-US" dirty="0" err="1"/>
+              <a:t>kỳ</a:t>
+            </a:r>
+            <a:r>
+              <a:rPr lang="en-US" dirty="0"/>
+              <a:t> </a:t>
+            </a:r>
+            <a:r>
+              <a:rPr lang="en-US" dirty="0" err="1"/>
+              <a:t>quan</a:t>
+            </a:r>
+            <a:r>
+              <a:rPr lang="en-US" dirty="0"/>
+              <a:t> </a:t>
+            </a:r>
+            <a:r>
+              <a:rPr lang="en-US" dirty="0" err="1"/>
+              <a:t>trọng</a:t>
+            </a:r>
+            <a:r>
+              <a:rPr lang="en-US" dirty="0"/>
+              <a:t> </a:t>
+            </a:r>
+            <a:r>
+              <a:rPr lang="en-US" dirty="0" err="1"/>
+              <a:t>giữa</a:t>
+            </a:r>
+            <a:r>
+              <a:rPr lang="en-US" dirty="0"/>
+              <a:t> </a:t>
+            </a:r>
+            <a:r>
+              <a:rPr lang="en-US" dirty="0" err="1"/>
+              <a:t>hai</a:t>
+            </a:r>
+            <a:r>
+              <a:rPr lang="en-US" dirty="0"/>
+              <a:t> </a:t>
+            </a:r>
+            <a:r>
+              <a:rPr lang="en-US" dirty="0" err="1"/>
+              <a:t>định</a:t>
+            </a:r>
+            <a:r>
+              <a:rPr lang="en-US" dirty="0"/>
+              <a:t> </a:t>
+            </a:r>
+            <a:r>
+              <a:rPr lang="en-US" dirty="0" err="1" smtClean="0"/>
+              <a:t>nghĩa</a:t>
+            </a:r>
+            <a:r>
+              <a:rPr lang="en-US" dirty="0" smtClean="0"/>
+              <a:t> </a:t>
+            </a:r>
+            <a:r>
+              <a:rPr lang="en-US" dirty="0" err="1" smtClean="0"/>
+              <a:t>trên</a:t>
+            </a:r>
+            <a:r>
+              <a:rPr lang="en-US" dirty="0" smtClean="0"/>
+              <a:t>:</a:t>
+            </a:r>
+            <a:endParaRPr lang="en-US" dirty="0"/>
+          </a:p>
+        </p:txBody>
+      </p:sp>
+      <p:sp>
+        <p:nvSpPr>
+          <p:cNvPr id="7" name="Rectangle 6"/>
+          <p:cNvSpPr/>
+          <p:nvPr/>
+        </p:nvSpPr>
+        <p:spPr>
+          <a:xfrm>
+            <a:off x="1786079" y="3375549"/>
+            <a:ext cx="6096000" cy="1477328"/>
+          </a:xfrm>
+          <a:prstGeom prst="rect">
+            <a:avLst/>
+          </a:prstGeom>
+        </p:spPr>
+        <p:txBody>
+          <a:bodyPr>
+            <a:spAutoFit/>
+          </a:bodyPr>
+          <a:lstStyle/>
+          <a:p>
+            <a:r>
+              <a:rPr lang="vi-VN" dirty="0"/>
+              <a:t>amessage là một mảng, có kích thước vừa đủ lớn để chứa chuỗi ký tự cùng với ký tự '\0' dùng để khởi tạo nó. Các ký tự riêng lẻ nằm trong mảng này có thể được thay đổi, nhưng tên mảng amessage sẽ luôn luôn tham chiếu đến cùng một vùng lưu trữ cố định đó.</a:t>
+            </a:r>
+            <a:endParaRPr lang="en-US" dirty="0"/>
+          </a:p>
+        </p:txBody>
+      </p:sp>
+      <p:sp>
+        <p:nvSpPr>
+          <p:cNvPr id="10" name="TextBox 9"/>
+          <p:cNvSpPr txBox="1"/>
+          <p:nvPr/>
+        </p:nvSpPr>
+        <p:spPr>
+          <a:xfrm>
+            <a:off x="1509685" y="5199017"/>
+            <a:ext cx="10548209" cy="646331"/>
+          </a:xfrm>
+          <a:prstGeom prst="rect">
+            <a:avLst/>
+          </a:prstGeom>
+          <a:noFill/>
+        </p:spPr>
+        <p:txBody>
+          <a:bodyPr wrap="none" rtlCol="0">
+            <a:spAutoFit/>
+          </a:bodyPr>
+          <a:lstStyle/>
+          <a:p>
+            <a:r>
+              <a:rPr lang="en-US" dirty="0" err="1" smtClean="0"/>
+              <a:t>pmessage</a:t>
+            </a:r>
+            <a:r>
+              <a:rPr lang="en-US" dirty="0" smtClean="0"/>
+              <a:t> </a:t>
+            </a:r>
+            <a:r>
+              <a:rPr lang="en-US" dirty="0" err="1" smtClean="0"/>
+              <a:t>là</a:t>
+            </a:r>
+            <a:r>
+              <a:rPr lang="en-US" dirty="0" smtClean="0"/>
+              <a:t> 1 con </a:t>
+            </a:r>
+            <a:r>
+              <a:rPr lang="en-US" dirty="0" err="1" smtClean="0"/>
+              <a:t>trỏ</a:t>
+            </a:r>
+            <a:r>
+              <a:rPr lang="en-US" dirty="0" smtClean="0"/>
+              <a:t>, </a:t>
+            </a:r>
+            <a:r>
+              <a:rPr lang="en-US" dirty="0" err="1" smtClean="0"/>
+              <a:t>được</a:t>
+            </a:r>
+            <a:r>
+              <a:rPr lang="en-US" dirty="0" smtClean="0"/>
+              <a:t> </a:t>
+            </a:r>
+            <a:r>
+              <a:rPr lang="en-US" dirty="0" err="1" smtClean="0"/>
+              <a:t>khởi</a:t>
+            </a:r>
+            <a:r>
+              <a:rPr lang="en-US" dirty="0" smtClean="0"/>
+              <a:t> </a:t>
+            </a:r>
+            <a:r>
+              <a:rPr lang="en-US" dirty="0" err="1" smtClean="0"/>
+              <a:t>tạo</a:t>
+            </a:r>
+            <a:r>
+              <a:rPr lang="en-US" dirty="0" smtClean="0"/>
+              <a:t> </a:t>
+            </a:r>
+            <a:r>
+              <a:rPr lang="en-US" dirty="0" err="1" smtClean="0"/>
+              <a:t>để</a:t>
+            </a:r>
+            <a:r>
+              <a:rPr lang="en-US" dirty="0" smtClean="0"/>
+              <a:t> </a:t>
+            </a:r>
+            <a:r>
+              <a:rPr lang="en-US" dirty="0" err="1" smtClean="0"/>
+              <a:t>trỏ</a:t>
+            </a:r>
+            <a:r>
+              <a:rPr lang="en-US" dirty="0" smtClean="0"/>
+              <a:t> </a:t>
+            </a:r>
+            <a:r>
+              <a:rPr lang="en-US" dirty="0" err="1" smtClean="0"/>
+              <a:t>đến</a:t>
+            </a:r>
+            <a:r>
+              <a:rPr lang="en-US" dirty="0" smtClean="0"/>
+              <a:t> 1 </a:t>
+            </a:r>
+            <a:r>
+              <a:rPr lang="en-US" dirty="0" err="1" smtClean="0"/>
+              <a:t>hằng</a:t>
+            </a:r>
+            <a:r>
+              <a:rPr lang="en-US" dirty="0" smtClean="0"/>
+              <a:t> </a:t>
+            </a:r>
+            <a:r>
+              <a:rPr lang="en-US" dirty="0" err="1" smtClean="0"/>
+              <a:t>chuỗi</a:t>
+            </a:r>
+            <a:r>
+              <a:rPr lang="en-US" dirty="0" smtClean="0"/>
+              <a:t>, </a:t>
+            </a:r>
+            <a:r>
+              <a:rPr lang="en-US" dirty="0" err="1" smtClean="0"/>
+              <a:t>và</a:t>
+            </a:r>
+            <a:r>
+              <a:rPr lang="en-US" dirty="0" smtClean="0"/>
+              <a:t> </a:t>
+            </a:r>
+            <a:r>
+              <a:rPr lang="en-US" dirty="0" err="1" smtClean="0"/>
+              <a:t>pmessage</a:t>
+            </a:r>
+            <a:r>
+              <a:rPr lang="en-US" dirty="0" smtClean="0"/>
+              <a:t> </a:t>
+            </a:r>
+            <a:r>
+              <a:rPr lang="en-US" dirty="0" err="1" smtClean="0"/>
+              <a:t>có</a:t>
+            </a:r>
+            <a:r>
+              <a:rPr lang="en-US" dirty="0" smtClean="0"/>
+              <a:t> </a:t>
+            </a:r>
+            <a:r>
+              <a:rPr lang="en-US" dirty="0" err="1" smtClean="0"/>
+              <a:t>thể</a:t>
+            </a:r>
+            <a:r>
+              <a:rPr lang="en-US" dirty="0" smtClean="0"/>
+              <a:t> </a:t>
+            </a:r>
+            <a:r>
+              <a:rPr lang="en-US" dirty="0" err="1" smtClean="0"/>
+              <a:t>được</a:t>
+            </a:r>
+            <a:r>
+              <a:rPr lang="en-US" dirty="0" smtClean="0"/>
+              <a:t> </a:t>
+            </a:r>
+            <a:r>
+              <a:rPr lang="en-US" dirty="0" err="1" smtClean="0"/>
+              <a:t>được</a:t>
+            </a:r>
+            <a:r>
+              <a:rPr lang="en-US" dirty="0" smtClean="0"/>
+              <a:t> </a:t>
+            </a:r>
+            <a:r>
+              <a:rPr lang="en-US" dirty="0" err="1" smtClean="0"/>
+              <a:t>sửa</a:t>
+            </a:r>
+            <a:r>
+              <a:rPr lang="en-US" dirty="0" smtClean="0"/>
+              <a:t> </a:t>
+            </a:r>
+            <a:r>
+              <a:rPr lang="en-US" dirty="0" err="1" smtClean="0"/>
+              <a:t>đổi</a:t>
+            </a:r>
+            <a:r>
+              <a:rPr lang="en-US" dirty="0" smtClean="0"/>
+              <a:t> </a:t>
+            </a:r>
+            <a:r>
+              <a:rPr lang="en-US" dirty="0" err="1" smtClean="0"/>
+              <a:t>để</a:t>
+            </a:r>
+            <a:endParaRPr lang="en-US" dirty="0" smtClean="0"/>
+          </a:p>
+          <a:p>
+            <a:r>
+              <a:rPr lang="en-US" dirty="0" err="1"/>
+              <a:t>t</a:t>
+            </a:r>
+            <a:r>
+              <a:rPr lang="en-US" dirty="0" err="1" smtClean="0"/>
+              <a:t>rỏ</a:t>
+            </a:r>
+            <a:r>
+              <a:rPr lang="en-US" dirty="0" smtClean="0"/>
+              <a:t> sang </a:t>
+            </a:r>
+            <a:r>
+              <a:rPr lang="en-US" dirty="0" err="1" smtClean="0"/>
+              <a:t>vị</a:t>
+            </a:r>
+            <a:r>
+              <a:rPr lang="en-US" dirty="0" smtClean="0"/>
+              <a:t> </a:t>
+            </a:r>
+            <a:r>
+              <a:rPr lang="en-US" dirty="0" err="1" smtClean="0"/>
+              <a:t>trí</a:t>
+            </a:r>
+            <a:r>
+              <a:rPr lang="en-US" dirty="0" smtClean="0"/>
+              <a:t> </a:t>
+            </a:r>
+            <a:r>
+              <a:rPr lang="en-US" dirty="0" err="1" smtClean="0"/>
+              <a:t>khác</a:t>
+            </a:r>
+            <a:r>
+              <a:rPr lang="en-US" dirty="0" smtClean="0"/>
+              <a:t>, </a:t>
+            </a:r>
+            <a:r>
+              <a:rPr lang="en-US" dirty="0" err="1" smtClean="0"/>
+              <a:t>nhưng</a:t>
+            </a:r>
+            <a:r>
+              <a:rPr lang="en-US" dirty="0" smtClean="0"/>
+              <a:t> </a:t>
+            </a:r>
+            <a:r>
+              <a:rPr lang="en-US" dirty="0" err="1" smtClean="0"/>
+              <a:t>chương</a:t>
+            </a:r>
+            <a:r>
+              <a:rPr lang="en-US" dirty="0" smtClean="0"/>
+              <a:t> </a:t>
+            </a:r>
+            <a:r>
+              <a:rPr lang="en-US" dirty="0" err="1" smtClean="0"/>
+              <a:t>trình</a:t>
+            </a:r>
+            <a:r>
+              <a:rPr lang="en-US" dirty="0" smtClean="0"/>
+              <a:t> </a:t>
+            </a:r>
+            <a:r>
+              <a:rPr lang="en-US" dirty="0" err="1" smtClean="0"/>
+              <a:t>sẽ</a:t>
+            </a:r>
+            <a:r>
+              <a:rPr lang="en-US" dirty="0" smtClean="0"/>
+              <a:t> </a:t>
+            </a:r>
+            <a:r>
+              <a:rPr lang="en-US" dirty="0" err="1" smtClean="0"/>
+              <a:t>lỗi</a:t>
+            </a:r>
+            <a:r>
+              <a:rPr lang="en-US" dirty="0" smtClean="0"/>
+              <a:t> </a:t>
+            </a:r>
+            <a:r>
+              <a:rPr lang="en-US" dirty="0" err="1" smtClean="0"/>
+              <a:t>nếu</a:t>
+            </a:r>
+            <a:r>
+              <a:rPr lang="en-US" dirty="0" smtClean="0"/>
+              <a:t> </a:t>
+            </a:r>
+            <a:r>
+              <a:rPr lang="en-US" dirty="0" err="1" smtClean="0"/>
+              <a:t>cố</a:t>
+            </a:r>
+            <a:r>
+              <a:rPr lang="en-US" dirty="0" smtClean="0"/>
+              <a:t> </a:t>
+            </a:r>
+            <a:r>
+              <a:rPr lang="en-US" dirty="0" err="1" smtClean="0"/>
+              <a:t>tình</a:t>
+            </a:r>
+            <a:r>
+              <a:rPr lang="en-US" dirty="0" smtClean="0"/>
+              <a:t> </a:t>
+            </a:r>
+            <a:r>
+              <a:rPr lang="en-US" dirty="0" err="1" smtClean="0"/>
+              <a:t>thay</a:t>
+            </a:r>
+            <a:r>
+              <a:rPr lang="en-US" dirty="0" smtClean="0"/>
+              <a:t> </a:t>
+            </a:r>
+            <a:r>
+              <a:rPr lang="en-US" dirty="0" err="1" smtClean="0"/>
+              <a:t>đổi</a:t>
+            </a:r>
+            <a:r>
+              <a:rPr lang="en-US" dirty="0" smtClean="0"/>
+              <a:t> </a:t>
+            </a:r>
+            <a:r>
+              <a:rPr lang="en-US" dirty="0" err="1" smtClean="0"/>
+              <a:t>nội</a:t>
+            </a:r>
+            <a:r>
+              <a:rPr lang="en-US" dirty="0" smtClean="0"/>
+              <a:t> dung </a:t>
+            </a:r>
+            <a:r>
+              <a:rPr lang="en-US" dirty="0" err="1" smtClean="0"/>
+              <a:t>của</a:t>
+            </a:r>
+            <a:r>
+              <a:rPr lang="en-US" dirty="0" smtClean="0"/>
+              <a:t> </a:t>
+            </a:r>
+            <a:r>
+              <a:rPr lang="en-US" dirty="0" err="1" smtClean="0"/>
+              <a:t>chuỗi</a:t>
+            </a:r>
+            <a:r>
+              <a:rPr lang="en-US" dirty="0" smtClean="0"/>
+              <a:t> </a:t>
+            </a:r>
+            <a:r>
+              <a:rPr lang="en-US" dirty="0" err="1" smtClean="0"/>
+              <a:t>kí</a:t>
+            </a:r>
+            <a:r>
+              <a:rPr lang="en-US" dirty="0" smtClean="0"/>
+              <a:t> </a:t>
+            </a:r>
+            <a:r>
+              <a:rPr lang="en-US" dirty="0" err="1" smtClean="0"/>
+              <a:t>tự</a:t>
+            </a:r>
+            <a:r>
+              <a:rPr lang="en-US" dirty="0"/>
+              <a:t> </a:t>
+            </a:r>
+            <a:r>
+              <a:rPr lang="en-US" dirty="0" err="1" smtClean="0"/>
+              <a:t>mà</a:t>
+            </a:r>
+            <a:r>
+              <a:rPr lang="en-US" dirty="0" smtClean="0"/>
+              <a:t> </a:t>
+            </a:r>
+            <a:r>
+              <a:rPr lang="en-US" dirty="0" err="1" smtClean="0"/>
+              <a:t>nó</a:t>
+            </a:r>
+            <a:r>
+              <a:rPr lang="en-US" dirty="0" smtClean="0"/>
+              <a:t> </a:t>
+            </a:r>
+            <a:r>
+              <a:rPr lang="en-US" dirty="0" err="1" smtClean="0"/>
+              <a:t>đang</a:t>
+            </a:r>
+            <a:r>
+              <a:rPr lang="en-US" dirty="0" smtClean="0"/>
+              <a:t> </a:t>
+            </a:r>
+            <a:r>
+              <a:rPr lang="en-US" dirty="0" err="1" smtClean="0"/>
+              <a:t>trỏ</a:t>
+            </a:r>
+            <a:r>
+              <a:rPr lang="en-US" dirty="0" smtClean="0"/>
+              <a:t> </a:t>
+            </a:r>
+            <a:r>
+              <a:rPr lang="en-US" dirty="0" err="1" smtClean="0"/>
+              <a:t>tới</a:t>
+            </a:r>
+            <a:r>
+              <a:rPr lang="en-US" dirty="0" smtClean="0"/>
+              <a:t>.</a:t>
+            </a:r>
+            <a:endParaRPr lang="en-US" dirty="0"/>
+          </a:p>
+        </p:txBody>
+      </p:sp>
+      <p:sp>
+        <p:nvSpPr>
+          <p:cNvPr id="12" name="TextBox 11"/>
+          <p:cNvSpPr txBox="1"/>
+          <p:nvPr/>
+        </p:nvSpPr>
+        <p:spPr>
+          <a:xfrm>
+            <a:off x="1158240" y="330926"/>
+            <a:ext cx="1421671" cy="369332"/>
+          </a:xfrm>
+          <a:prstGeom prst="rect">
+            <a:avLst/>
+          </a:prstGeom>
+          <a:noFill/>
+        </p:spPr>
+        <p:txBody>
+          <a:bodyPr wrap="none" rtlCol="0">
+            <a:spAutoFit/>
+          </a:bodyPr>
+          <a:lstStyle/>
+          <a:p>
+            <a:r>
+              <a:rPr lang="en-US" dirty="0" smtClean="0"/>
+              <a:t>Con </a:t>
+            </a:r>
+            <a:r>
+              <a:rPr lang="en-US" dirty="0" err="1" smtClean="0"/>
+              <a:t>trỏ</a:t>
+            </a:r>
+            <a:r>
+              <a:rPr lang="en-US" dirty="0" smtClean="0"/>
+              <a:t> </a:t>
+            </a:r>
+            <a:r>
+              <a:rPr lang="en-US" dirty="0" err="1" smtClean="0"/>
+              <a:t>kí</a:t>
+            </a:r>
+            <a:r>
+              <a:rPr lang="en-US" dirty="0" smtClean="0"/>
+              <a:t> </a:t>
+            </a:r>
+            <a:r>
+              <a:rPr lang="en-US" dirty="0" err="1" smtClean="0"/>
+              <a:t>tự</a:t>
+            </a:r>
+            <a:r>
+              <a:rPr lang="en-US" dirty="0" smtClean="0"/>
+              <a:t>:</a:t>
+            </a:r>
+            <a:endParaRPr lang="en-US" dirty="0"/>
+          </a:p>
+        </p:txBody>
+      </p:sp>
+      <p:sp>
+        <p:nvSpPr>
+          <p:cNvPr id="13" name="Rectangle 12"/>
+          <p:cNvSpPr/>
+          <p:nvPr/>
+        </p:nvSpPr>
+        <p:spPr>
+          <a:xfrm>
+            <a:off x="1878030" y="6006822"/>
+            <a:ext cx="2558649" cy="369332"/>
+          </a:xfrm>
+          <a:prstGeom prst="rect">
+            <a:avLst/>
+          </a:prstGeom>
+        </p:spPr>
+        <p:txBody>
+          <a:bodyPr wrap="none">
+            <a:spAutoFit/>
+          </a:bodyPr>
+          <a:lstStyle/>
+          <a:p>
+            <a:r>
+              <a:rPr lang="en-US" dirty="0"/>
+              <a:t>char *</a:t>
+            </a:r>
+            <a:r>
+              <a:rPr lang="en-US" dirty="0" err="1"/>
+              <a:t>lineptr</a:t>
+            </a:r>
+            <a:r>
+              <a:rPr lang="en-US" dirty="0"/>
+              <a:t>[MAXLINES];</a:t>
+            </a:r>
+          </a:p>
+        </p:txBody>
+      </p:sp>
+      <p:sp>
+        <p:nvSpPr>
+          <p:cNvPr id="14" name="TextBox 13"/>
+          <p:cNvSpPr txBox="1"/>
+          <p:nvPr/>
+        </p:nvSpPr>
+        <p:spPr>
+          <a:xfrm>
+            <a:off x="4520571" y="6037901"/>
+            <a:ext cx="3968394" cy="369332"/>
+          </a:xfrm>
+          <a:prstGeom prst="rect">
+            <a:avLst/>
+          </a:prstGeom>
+          <a:noFill/>
+        </p:spPr>
+        <p:txBody>
+          <a:bodyPr wrap="none" rtlCol="0">
+            <a:spAutoFit/>
+          </a:bodyPr>
+          <a:lstStyle/>
+          <a:p>
+            <a:r>
+              <a:rPr lang="en-US" dirty="0" err="1" smtClean="0"/>
+              <a:t>Đây</a:t>
+            </a:r>
+            <a:r>
+              <a:rPr lang="en-US" dirty="0" smtClean="0"/>
+              <a:t> </a:t>
+            </a:r>
+            <a:r>
+              <a:rPr lang="en-US" dirty="0" err="1" smtClean="0"/>
+              <a:t>là</a:t>
+            </a:r>
+            <a:r>
+              <a:rPr lang="en-US" dirty="0" smtClean="0"/>
+              <a:t> </a:t>
+            </a:r>
+            <a:r>
+              <a:rPr lang="en-US" dirty="0" err="1" smtClean="0"/>
+              <a:t>cách</a:t>
+            </a:r>
+            <a:r>
+              <a:rPr lang="en-US" dirty="0" smtClean="0"/>
+              <a:t> </a:t>
+            </a:r>
+            <a:r>
+              <a:rPr lang="en-US" dirty="0" err="1" smtClean="0"/>
+              <a:t>khai</a:t>
+            </a:r>
+            <a:r>
+              <a:rPr lang="en-US" dirty="0" smtClean="0"/>
+              <a:t> </a:t>
+            </a:r>
+            <a:r>
+              <a:rPr lang="en-US" dirty="0" err="1" smtClean="0"/>
+              <a:t>báo</a:t>
+            </a:r>
+            <a:r>
+              <a:rPr lang="en-US" dirty="0" smtClean="0"/>
+              <a:t> 1 </a:t>
+            </a:r>
+            <a:r>
+              <a:rPr lang="en-US" dirty="0" err="1" smtClean="0"/>
+              <a:t>mảng</a:t>
+            </a:r>
+            <a:r>
+              <a:rPr lang="en-US" dirty="0" smtClean="0"/>
+              <a:t> </a:t>
+            </a:r>
+            <a:r>
+              <a:rPr lang="en-US" dirty="0" err="1" smtClean="0"/>
+              <a:t>các</a:t>
+            </a:r>
+            <a:r>
+              <a:rPr lang="en-US" dirty="0" smtClean="0"/>
+              <a:t> con </a:t>
+            </a:r>
+            <a:r>
+              <a:rPr lang="en-US" dirty="0" err="1" smtClean="0"/>
+              <a:t>trỏ</a:t>
+            </a:r>
+            <a:r>
+              <a:rPr lang="en-US" dirty="0" smtClean="0"/>
+              <a:t>.</a:t>
+            </a:r>
+            <a:endParaRPr lang="en-US" dirty="0"/>
+          </a:p>
+        </p:txBody>
+      </p:sp>
+    </p:spTree>
+    <p:extLst>
+      <p:ext uri="{BB962C8B-B14F-4D97-AF65-F5344CB8AC3E}">
+        <p14:creationId xmlns:p14="http://schemas.microsoft.com/office/powerpoint/2010/main" val="2668060874"/>
+      </p:ext>
+    </p:extLst>
+  </p:cSld>
+  <p:clrMapOvr>
+    <a:masterClrMapping/>
+  </p:clrMapOvr>
+</p:sld>
+</file>
+
+<file path=ppt/slides/slide18.xml><?xml version="1.0" encoding="utf-8"?>
+<p:sld xmlns:a="http://schemas.openxmlformats.org/drawingml/2006/main" xmlns:r="http://schemas.openxmlformats.org/officeDocument/2006/relationships" xmlns:p="http://schemas.openxmlformats.org/presentationml/2006/main">
+  <p:cSld>
+    <p:spTree>
+      <p:nvGrpSpPr>
+        <p:cNvPr id="1" name=""/>
+        <p:cNvGrpSpPr/>
+        <p:nvPr/>
+      </p:nvGrpSpPr>
+      <p:grpSpPr>
+        <a:xfrm>
+          <a:off x="0" y="0"/>
+          <a:ext cx="0" cy="0"/>
+          <a:chOff x="0" y="0"/>
+          <a:chExt cx="0" cy="0"/>
+        </a:xfrm>
+      </p:grpSpPr>
+      <p:sp>
+        <p:nvSpPr>
+          <p:cNvPr id="4" name="TextBox 3"/>
+          <p:cNvSpPr txBox="1"/>
+          <p:nvPr/>
+        </p:nvSpPr>
+        <p:spPr>
+          <a:xfrm>
+            <a:off x="1724297" y="792480"/>
+            <a:ext cx="2328651" cy="369332"/>
+          </a:xfrm>
+          <a:prstGeom prst="rect">
+            <a:avLst/>
+          </a:prstGeom>
+          <a:noFill/>
+        </p:spPr>
+        <p:txBody>
+          <a:bodyPr wrap="none" rtlCol="0">
+            <a:spAutoFit/>
+          </a:bodyPr>
+          <a:lstStyle/>
+          <a:p>
+            <a:r>
+              <a:rPr lang="en-US" dirty="0" smtClean="0"/>
+              <a:t>Pointer to pointer (</a:t>
+            </a:r>
+            <a:r>
+              <a:rPr lang="en-US" dirty="0" err="1" smtClean="0"/>
+              <a:t>gfg</a:t>
+            </a:r>
+            <a:r>
+              <a:rPr lang="en-US" dirty="0" smtClean="0"/>
+              <a:t>)</a:t>
+            </a:r>
+            <a:endParaRPr lang="en-US" dirty="0"/>
+          </a:p>
+        </p:txBody>
+      </p:sp>
+    </p:spTree>
+    <p:extLst>
+      <p:ext uri="{BB962C8B-B14F-4D97-AF65-F5344CB8AC3E}">
+        <p14:creationId xmlns:p14="http://schemas.microsoft.com/office/powerpoint/2010/main" val="4034963460"/>
+      </p:ext>
+    </p:extLst>
+  </p:cSld>
+  <p:clrMapOvr>
+    <a:masterClrMapping/>
+  </p:clrMapOvr>
+</p:sld>
+</file>
+
+<file path=ppt/slides/slide19.xml><?xml version="1.0" encoding="utf-8"?>
+<p:sld xmlns:a="http://schemas.openxmlformats.org/drawingml/2006/main" xmlns:r="http://schemas.openxmlformats.org/officeDocument/2006/relationships" xmlns:p="http://schemas.openxmlformats.org/presentationml/2006/main">
+  <p:cSld>
+    <p:spTree>
+      <p:nvGrpSpPr>
+        <p:cNvPr id="1" name=""/>
+        <p:cNvGrpSpPr/>
+        <p:nvPr/>
+      </p:nvGrpSpPr>
+      <p:grpSpPr>
+        <a:xfrm>
+          <a:off x="0" y="0"/>
+          <a:ext cx="0" cy="0"/>
+          <a:chOff x="0" y="0"/>
+          <a:chExt cx="0" cy="0"/>
+        </a:xfrm>
+      </p:grpSpPr>
+      <p:sp>
+        <p:nvSpPr>
+          <p:cNvPr id="4" name="TextBox 3"/>
+          <p:cNvSpPr txBox="1"/>
+          <p:nvPr/>
+        </p:nvSpPr>
+        <p:spPr>
+          <a:xfrm>
+            <a:off x="975360" y="339634"/>
+            <a:ext cx="910377" cy="369332"/>
+          </a:xfrm>
+          <a:prstGeom prst="rect">
+            <a:avLst/>
+          </a:prstGeom>
+          <a:noFill/>
+        </p:spPr>
+        <p:txBody>
+          <a:bodyPr wrap="none" rtlCol="0">
+            <a:spAutoFit/>
+          </a:bodyPr>
+          <a:lstStyle/>
+          <a:p>
+            <a:r>
+              <a:rPr lang="en-US" dirty="0" smtClean="0"/>
+              <a:t>STRUCT</a:t>
+            </a:r>
+            <a:endParaRPr lang="en-US" dirty="0"/>
+          </a:p>
+        </p:txBody>
+      </p:sp>
+      <p:pic>
+        <p:nvPicPr>
+          <p:cNvPr id="5" name="Picture 4"/>
+          <p:cNvPicPr>
+            <a:picLocks noChangeAspect="1"/>
+          </p:cNvPicPr>
+          <p:nvPr/>
+        </p:nvPicPr>
+        <p:blipFill>
+          <a:blip r:embed="rId2"/>
+          <a:stretch>
+            <a:fillRect/>
+          </a:stretch>
+        </p:blipFill>
+        <p:spPr>
+          <a:xfrm>
+            <a:off x="1113523" y="907417"/>
+            <a:ext cx="3172268" cy="619211"/>
+          </a:xfrm>
+          <a:prstGeom prst="rect">
+            <a:avLst/>
+          </a:prstGeom>
+        </p:spPr>
+      </p:pic>
+      <p:sp>
+        <p:nvSpPr>
+          <p:cNvPr id="6" name="TextBox 5"/>
+          <p:cNvSpPr txBox="1"/>
+          <p:nvPr/>
+        </p:nvSpPr>
+        <p:spPr>
+          <a:xfrm>
+            <a:off x="1262743" y="1637211"/>
+            <a:ext cx="10280763" cy="646331"/>
+          </a:xfrm>
+          <a:prstGeom prst="rect">
+            <a:avLst/>
+          </a:prstGeom>
+          <a:noFill/>
+        </p:spPr>
+        <p:txBody>
+          <a:bodyPr wrap="none" rtlCol="0">
+            <a:spAutoFit/>
+          </a:bodyPr>
+          <a:lstStyle/>
+          <a:p>
+            <a:r>
+              <a:rPr lang="en-US" dirty="0" smtClean="0"/>
+              <a:t>1 </a:t>
+            </a:r>
+            <a:r>
+              <a:rPr lang="en-US" dirty="0" err="1" smtClean="0"/>
+              <a:t>struct</a:t>
+            </a:r>
+            <a:r>
+              <a:rPr lang="en-US" dirty="0" smtClean="0"/>
+              <a:t> </a:t>
+            </a:r>
+            <a:r>
+              <a:rPr lang="en-US" dirty="0" err="1" smtClean="0"/>
+              <a:t>lớn</a:t>
+            </a:r>
+            <a:r>
+              <a:rPr lang="en-US" dirty="0" smtClean="0"/>
+              <a:t> </a:t>
+            </a:r>
+            <a:r>
+              <a:rPr lang="en-US" dirty="0" err="1" smtClean="0"/>
+              <a:t>được</a:t>
+            </a:r>
+            <a:r>
+              <a:rPr lang="en-US" dirty="0" smtClean="0"/>
+              <a:t> </a:t>
+            </a:r>
+            <a:r>
+              <a:rPr lang="en-US" dirty="0" err="1" smtClean="0"/>
+              <a:t>được</a:t>
+            </a:r>
+            <a:r>
+              <a:rPr lang="en-US" dirty="0" smtClean="0"/>
+              <a:t> </a:t>
+            </a:r>
+            <a:r>
+              <a:rPr lang="en-US" dirty="0" err="1" smtClean="0"/>
+              <a:t>truyền</a:t>
+            </a:r>
+            <a:r>
+              <a:rPr lang="en-US" dirty="0" smtClean="0"/>
+              <a:t> </a:t>
+            </a:r>
+            <a:r>
+              <a:rPr lang="en-US" dirty="0" err="1" smtClean="0"/>
+              <a:t>vào</a:t>
+            </a:r>
+            <a:r>
+              <a:rPr lang="en-US" dirty="0" smtClean="0"/>
+              <a:t> </a:t>
+            </a:r>
+            <a:r>
+              <a:rPr lang="en-US" dirty="0" err="1" smtClean="0"/>
+              <a:t>hàm</a:t>
+            </a:r>
+            <a:r>
+              <a:rPr lang="en-US" dirty="0" smtClean="0"/>
+              <a:t> </a:t>
+            </a:r>
+            <a:r>
+              <a:rPr lang="en-US" dirty="0" err="1" smtClean="0"/>
+              <a:t>thì</a:t>
+            </a:r>
+            <a:r>
+              <a:rPr lang="en-US" dirty="0" smtClean="0"/>
+              <a:t> </a:t>
+            </a:r>
+            <a:r>
+              <a:rPr lang="en-US" dirty="0" err="1" smtClean="0"/>
+              <a:t>thông</a:t>
+            </a:r>
+            <a:r>
+              <a:rPr lang="en-US" dirty="0" smtClean="0"/>
+              <a:t> </a:t>
+            </a:r>
+            <a:r>
+              <a:rPr lang="en-US" dirty="0" err="1" smtClean="0"/>
+              <a:t>thường</a:t>
+            </a:r>
+            <a:r>
+              <a:rPr lang="en-US" dirty="0" smtClean="0"/>
+              <a:t> </a:t>
+            </a:r>
+            <a:r>
+              <a:rPr lang="en-US" dirty="0" err="1" smtClean="0"/>
+              <a:t>việc</a:t>
+            </a:r>
+            <a:r>
+              <a:rPr lang="en-US" dirty="0" smtClean="0"/>
+              <a:t> </a:t>
+            </a:r>
+            <a:r>
+              <a:rPr lang="en-US" dirty="0" err="1" smtClean="0"/>
+              <a:t>truyền</a:t>
+            </a:r>
+            <a:r>
+              <a:rPr lang="en-US" dirty="0" smtClean="0"/>
+              <a:t> con </a:t>
+            </a:r>
+            <a:r>
+              <a:rPr lang="en-US" dirty="0" err="1" smtClean="0"/>
+              <a:t>trỏ</a:t>
+            </a:r>
+            <a:r>
+              <a:rPr lang="en-US" dirty="0" smtClean="0"/>
+              <a:t> </a:t>
+            </a:r>
+            <a:r>
+              <a:rPr lang="en-US" dirty="0" err="1" smtClean="0"/>
+              <a:t>sẽ</a:t>
+            </a:r>
+            <a:r>
+              <a:rPr lang="en-US" dirty="0" smtClean="0"/>
+              <a:t> </a:t>
+            </a:r>
+            <a:r>
+              <a:rPr lang="en-US" dirty="0" err="1" smtClean="0"/>
+              <a:t>hiệu</a:t>
+            </a:r>
+            <a:r>
+              <a:rPr lang="en-US" dirty="0" smtClean="0"/>
+              <a:t> </a:t>
+            </a:r>
+            <a:r>
+              <a:rPr lang="en-US" dirty="0" err="1" smtClean="0"/>
+              <a:t>quả</a:t>
+            </a:r>
+            <a:r>
+              <a:rPr lang="en-US" dirty="0" smtClean="0"/>
+              <a:t> </a:t>
+            </a:r>
+            <a:r>
+              <a:rPr lang="en-US" dirty="0" err="1" smtClean="0"/>
+              <a:t>hơn</a:t>
+            </a:r>
+            <a:r>
+              <a:rPr lang="en-US" dirty="0" smtClean="0"/>
+              <a:t> </a:t>
+            </a:r>
+            <a:r>
+              <a:rPr lang="en-US" dirty="0" err="1" smtClean="0"/>
+              <a:t>việc</a:t>
+            </a:r>
+            <a:r>
+              <a:rPr lang="en-US" dirty="0" smtClean="0"/>
+              <a:t> </a:t>
+            </a:r>
+            <a:r>
+              <a:rPr lang="en-US" dirty="0" err="1" smtClean="0"/>
+              <a:t>sao</a:t>
+            </a:r>
+            <a:r>
+              <a:rPr lang="en-US" dirty="0" smtClean="0"/>
+              <a:t> </a:t>
+            </a:r>
+            <a:r>
+              <a:rPr lang="en-US" dirty="0" err="1" smtClean="0"/>
+              <a:t>chép</a:t>
+            </a:r>
+            <a:r>
+              <a:rPr lang="en-US" dirty="0" smtClean="0"/>
+              <a:t> </a:t>
+            </a:r>
+          </a:p>
+          <a:p>
+            <a:r>
+              <a:rPr lang="en-US" dirty="0" err="1" smtClean="0"/>
+              <a:t>Toàn</a:t>
+            </a:r>
+            <a:r>
+              <a:rPr lang="en-US" dirty="0" smtClean="0"/>
+              <a:t> </a:t>
+            </a:r>
+            <a:r>
+              <a:rPr lang="en-US" dirty="0" err="1" smtClean="0"/>
+              <a:t>bộ</a:t>
+            </a:r>
+            <a:r>
+              <a:rPr lang="en-US" dirty="0" smtClean="0"/>
+              <a:t> </a:t>
+            </a:r>
+            <a:r>
+              <a:rPr lang="en-US" dirty="0" err="1" smtClean="0"/>
+              <a:t>struct</a:t>
+            </a:r>
+            <a:r>
+              <a:rPr lang="en-US" dirty="0" smtClean="0"/>
+              <a:t>.</a:t>
+            </a:r>
+          </a:p>
+        </p:txBody>
+      </p:sp>
+      <p:pic>
+        <p:nvPicPr>
+          <p:cNvPr id="7" name="Picture 6"/>
+          <p:cNvPicPr>
+            <a:picLocks noChangeAspect="1"/>
+          </p:cNvPicPr>
+          <p:nvPr/>
+        </p:nvPicPr>
+        <p:blipFill>
+          <a:blip r:embed="rId3"/>
+          <a:stretch>
+            <a:fillRect/>
+          </a:stretch>
+        </p:blipFill>
+        <p:spPr>
+          <a:xfrm>
+            <a:off x="1262743" y="2283542"/>
+            <a:ext cx="8040222" cy="1619476"/>
+          </a:xfrm>
+          <a:prstGeom prst="rect">
+            <a:avLst/>
+          </a:prstGeom>
+        </p:spPr>
+      </p:pic>
+      <p:sp>
+        <p:nvSpPr>
+          <p:cNvPr id="8" name="TextBox 7"/>
+          <p:cNvSpPr txBox="1"/>
+          <p:nvPr/>
+        </p:nvSpPr>
+        <p:spPr>
+          <a:xfrm>
+            <a:off x="1262743" y="3903018"/>
+            <a:ext cx="9995557" cy="646331"/>
+          </a:xfrm>
+          <a:prstGeom prst="rect">
+            <a:avLst/>
+          </a:prstGeom>
+          <a:noFill/>
+        </p:spPr>
+        <p:txBody>
+          <a:bodyPr wrap="none" rtlCol="0">
+            <a:spAutoFit/>
+          </a:bodyPr>
+          <a:lstStyle/>
+          <a:p>
+            <a:r>
+              <a:rPr lang="en-US" dirty="0" smtClean="0"/>
+              <a:t>Con </a:t>
+            </a:r>
+            <a:r>
+              <a:rPr lang="en-US" dirty="0" err="1" smtClean="0"/>
+              <a:t>trỏ</a:t>
+            </a:r>
+            <a:r>
+              <a:rPr lang="en-US" dirty="0" smtClean="0"/>
+              <a:t> </a:t>
+            </a:r>
+            <a:r>
+              <a:rPr lang="en-US" dirty="0" err="1" smtClean="0"/>
+              <a:t>trỏ</a:t>
+            </a:r>
+            <a:r>
+              <a:rPr lang="en-US" dirty="0" smtClean="0"/>
+              <a:t> </a:t>
+            </a:r>
+            <a:r>
+              <a:rPr lang="en-US" dirty="0" err="1" smtClean="0"/>
+              <a:t>đến</a:t>
+            </a:r>
+            <a:r>
+              <a:rPr lang="en-US" dirty="0" smtClean="0"/>
+              <a:t> </a:t>
+            </a:r>
+            <a:r>
+              <a:rPr lang="en-US" dirty="0" err="1" smtClean="0"/>
+              <a:t>từng</a:t>
+            </a:r>
+            <a:r>
+              <a:rPr lang="en-US" dirty="0" smtClean="0"/>
+              <a:t> member </a:t>
+            </a:r>
+            <a:r>
+              <a:rPr lang="en-US" dirty="0" err="1" smtClean="0"/>
+              <a:t>của</a:t>
+            </a:r>
+            <a:r>
+              <a:rPr lang="en-US" dirty="0"/>
+              <a:t> </a:t>
+            </a:r>
+            <a:r>
+              <a:rPr lang="en-US" dirty="0" err="1" smtClean="0"/>
+              <a:t>struct</a:t>
+            </a:r>
+            <a:r>
+              <a:rPr lang="en-US" dirty="0"/>
+              <a:t>. </a:t>
+            </a:r>
+            <a:r>
+              <a:rPr lang="en-US" dirty="0" err="1"/>
+              <a:t>Dấu</a:t>
+            </a:r>
+            <a:r>
+              <a:rPr lang="en-US" dirty="0"/>
+              <a:t> </a:t>
+            </a:r>
+            <a:r>
+              <a:rPr lang="en-US" dirty="0" err="1"/>
+              <a:t>ngoặc</a:t>
+            </a:r>
+            <a:r>
+              <a:rPr lang="en-US" dirty="0"/>
+              <a:t> </a:t>
+            </a:r>
+            <a:r>
+              <a:rPr lang="en-US" dirty="0" err="1" smtClean="0"/>
+              <a:t>trong</a:t>
+            </a:r>
+            <a:r>
+              <a:rPr lang="en-US" dirty="0" smtClean="0"/>
+              <a:t> </a:t>
+            </a:r>
+            <a:r>
+              <a:rPr lang="en-US" dirty="0" err="1" smtClean="0"/>
+              <a:t>là</a:t>
+            </a:r>
+            <a:r>
+              <a:rPr lang="en-US" dirty="0" smtClean="0"/>
+              <a:t> </a:t>
+            </a:r>
+            <a:r>
+              <a:rPr lang="en-US" dirty="0" err="1" smtClean="0"/>
+              <a:t>bắt</a:t>
+            </a:r>
+            <a:r>
+              <a:rPr lang="en-US" dirty="0" smtClean="0"/>
+              <a:t> </a:t>
+            </a:r>
+            <a:r>
+              <a:rPr lang="en-US" dirty="0" err="1" smtClean="0"/>
+              <a:t>buộc</a:t>
+            </a:r>
+            <a:r>
+              <a:rPr lang="en-US" dirty="0" smtClean="0"/>
+              <a:t> </a:t>
+            </a:r>
+            <a:r>
+              <a:rPr lang="en-US" dirty="0" err="1" smtClean="0"/>
+              <a:t>vì</a:t>
+            </a:r>
+            <a:r>
+              <a:rPr lang="en-US" dirty="0" smtClean="0"/>
+              <a:t> </a:t>
+            </a:r>
+            <a:r>
+              <a:rPr lang="en-US" dirty="0" err="1" smtClean="0"/>
+              <a:t>toán</a:t>
+            </a:r>
+            <a:r>
+              <a:rPr lang="en-US" dirty="0" smtClean="0"/>
+              <a:t> </a:t>
+            </a:r>
+            <a:r>
+              <a:rPr lang="en-US" dirty="0" err="1" smtClean="0"/>
+              <a:t>tử</a:t>
+            </a:r>
+            <a:r>
+              <a:rPr lang="en-US" dirty="0" smtClean="0"/>
+              <a:t> </a:t>
+            </a:r>
+            <a:r>
+              <a:rPr lang="en-US" dirty="0" err="1" smtClean="0"/>
+              <a:t>truy</a:t>
+            </a:r>
+            <a:r>
+              <a:rPr lang="en-US" dirty="0" smtClean="0"/>
+              <a:t> </a:t>
+            </a:r>
+            <a:r>
+              <a:rPr lang="en-US" dirty="0" err="1" smtClean="0"/>
+              <a:t>cập</a:t>
+            </a:r>
+            <a:r>
+              <a:rPr lang="en-US" dirty="0" smtClean="0"/>
+              <a:t> </a:t>
+            </a:r>
+            <a:r>
+              <a:rPr lang="en-US" dirty="0" err="1" smtClean="0"/>
+              <a:t>thành</a:t>
+            </a:r>
+            <a:r>
+              <a:rPr lang="en-US" dirty="0" smtClean="0"/>
+              <a:t> </a:t>
+            </a:r>
+            <a:r>
+              <a:rPr lang="en-US" dirty="0" err="1" smtClean="0"/>
+              <a:t>viên</a:t>
+            </a:r>
+            <a:r>
+              <a:rPr lang="en-US" dirty="0" smtClean="0"/>
+              <a:t> ‘.’ </a:t>
+            </a:r>
+            <a:r>
+              <a:rPr lang="en-US" dirty="0" err="1" smtClean="0"/>
+              <a:t>có</a:t>
+            </a:r>
+            <a:endParaRPr lang="en-US" dirty="0"/>
+          </a:p>
+          <a:p>
+            <a:r>
+              <a:rPr lang="en-US" dirty="0" err="1"/>
+              <a:t>m</a:t>
+            </a:r>
+            <a:r>
+              <a:rPr lang="en-US" dirty="0" err="1" smtClean="0"/>
+              <a:t>ức</a:t>
+            </a:r>
+            <a:r>
+              <a:rPr lang="en-US" dirty="0" smtClean="0"/>
+              <a:t> </a:t>
+            </a:r>
+            <a:r>
+              <a:rPr lang="en-US" dirty="0" err="1" smtClean="0"/>
+              <a:t>độ</a:t>
+            </a:r>
+            <a:r>
+              <a:rPr lang="en-US" dirty="0" smtClean="0"/>
+              <a:t> </a:t>
+            </a:r>
+            <a:r>
+              <a:rPr lang="en-US" dirty="0" err="1" smtClean="0"/>
+              <a:t>ưu</a:t>
+            </a:r>
+            <a:r>
+              <a:rPr lang="en-US" dirty="0" smtClean="0"/>
+              <a:t> </a:t>
+            </a:r>
+            <a:r>
+              <a:rPr lang="en-US" dirty="0" err="1" smtClean="0"/>
+              <a:t>tiên</a:t>
+            </a:r>
+            <a:r>
+              <a:rPr lang="en-US" dirty="0" smtClean="0"/>
+              <a:t> </a:t>
+            </a:r>
+            <a:r>
+              <a:rPr lang="en-US" dirty="0" err="1" smtClean="0"/>
+              <a:t>cao</a:t>
+            </a:r>
+            <a:r>
+              <a:rPr lang="en-US" dirty="0" smtClean="0"/>
+              <a:t> </a:t>
+            </a:r>
+            <a:r>
+              <a:rPr lang="en-US" dirty="0" err="1" smtClean="0"/>
+              <a:t>hơn</a:t>
+            </a:r>
+            <a:r>
+              <a:rPr lang="en-US" dirty="0" smtClean="0"/>
+              <a:t> ‘*’.</a:t>
+            </a:r>
+          </a:p>
+        </p:txBody>
+      </p:sp>
+      <p:pic>
+        <p:nvPicPr>
+          <p:cNvPr id="12" name="Picture 11"/>
+          <p:cNvPicPr>
+            <a:picLocks noChangeAspect="1"/>
+          </p:cNvPicPr>
+          <p:nvPr/>
+        </p:nvPicPr>
+        <p:blipFill>
+          <a:blip r:embed="rId4"/>
+          <a:stretch>
+            <a:fillRect/>
+          </a:stretch>
+        </p:blipFill>
+        <p:spPr>
+          <a:xfrm>
+            <a:off x="1885737" y="4874703"/>
+            <a:ext cx="5372850" cy="1295581"/>
+          </a:xfrm>
+          <a:prstGeom prst="rect">
+            <a:avLst/>
+          </a:prstGeom>
+        </p:spPr>
+      </p:pic>
+    </p:spTree>
+    <p:extLst>
+      <p:ext uri="{BB962C8B-B14F-4D97-AF65-F5344CB8AC3E}">
+        <p14:creationId xmlns:p14="http://schemas.microsoft.com/office/powerpoint/2010/main" val="3550621526"/>
       </p:ext>
     </p:extLst>
   </p:cSld>
@@ -6587,6 +9454,1468 @@
     <p:extLst>
       <p:ext uri="{BB962C8B-B14F-4D97-AF65-F5344CB8AC3E}">
         <p14:creationId xmlns:p14="http://schemas.microsoft.com/office/powerpoint/2010/main" val="1869869419"/>
+      </p:ext>
+    </p:extLst>
+  </p:cSld>
+  <p:clrMapOvr>
+    <a:masterClrMapping/>
+  </p:clrMapOvr>
+</p:sld>
+</file>
+
+<file path=ppt/slides/slide20.xml><?xml version="1.0" encoding="utf-8"?>
+<p:sld xmlns:a="http://schemas.openxmlformats.org/drawingml/2006/main" xmlns:r="http://schemas.openxmlformats.org/officeDocument/2006/relationships" xmlns:p="http://schemas.openxmlformats.org/presentationml/2006/main">
+  <p:cSld>
+    <p:spTree>
+      <p:nvGrpSpPr>
+        <p:cNvPr id="1" name=""/>
+        <p:cNvGrpSpPr/>
+        <p:nvPr/>
+      </p:nvGrpSpPr>
+      <p:grpSpPr>
+        <a:xfrm>
+          <a:off x="0" y="0"/>
+          <a:ext cx="0" cy="0"/>
+          <a:chOff x="0" y="0"/>
+          <a:chExt cx="0" cy="0"/>
+        </a:xfrm>
+      </p:grpSpPr>
+      <p:pic>
+        <p:nvPicPr>
+          <p:cNvPr id="5" name="Picture 4"/>
+          <p:cNvPicPr>
+            <a:picLocks noChangeAspect="1"/>
+          </p:cNvPicPr>
+          <p:nvPr/>
+        </p:nvPicPr>
+        <p:blipFill>
+          <a:blip r:embed="rId2"/>
+          <a:stretch>
+            <a:fillRect/>
+          </a:stretch>
+        </p:blipFill>
+        <p:spPr>
+          <a:xfrm>
+            <a:off x="1922374" y="609600"/>
+            <a:ext cx="3590152" cy="4029453"/>
+          </a:xfrm>
+          <a:prstGeom prst="rect">
+            <a:avLst/>
+          </a:prstGeom>
+        </p:spPr>
+      </p:pic>
+    </p:spTree>
+    <p:extLst>
+      <p:ext uri="{BB962C8B-B14F-4D97-AF65-F5344CB8AC3E}">
+        <p14:creationId xmlns:p14="http://schemas.microsoft.com/office/powerpoint/2010/main" val="34114708"/>
+      </p:ext>
+    </p:extLst>
+  </p:cSld>
+  <p:clrMapOvr>
+    <a:masterClrMapping/>
+  </p:clrMapOvr>
+</p:sld>
+</file>
+
+<file path=ppt/slides/slide21.xml><?xml version="1.0" encoding="utf-8"?>
+<p:sld xmlns:a="http://schemas.openxmlformats.org/drawingml/2006/main" xmlns:r="http://schemas.openxmlformats.org/officeDocument/2006/relationships" xmlns:p="http://schemas.openxmlformats.org/presentationml/2006/main">
+  <p:cSld>
+    <p:spTree>
+      <p:nvGrpSpPr>
+        <p:cNvPr id="1" name=""/>
+        <p:cNvGrpSpPr/>
+        <p:nvPr/>
+      </p:nvGrpSpPr>
+      <p:grpSpPr>
+        <a:xfrm>
+          <a:off x="0" y="0"/>
+          <a:ext cx="0" cy="0"/>
+          <a:chOff x="0" y="0"/>
+          <a:chExt cx="0" cy="0"/>
+        </a:xfrm>
+      </p:grpSpPr>
+      <p:sp>
+        <p:nvSpPr>
+          <p:cNvPr id="4" name="Rectangle 3"/>
+          <p:cNvSpPr/>
+          <p:nvPr/>
+        </p:nvSpPr>
+        <p:spPr>
+          <a:xfrm>
+            <a:off x="1189223" y="788516"/>
+            <a:ext cx="3525965" cy="369332"/>
+          </a:xfrm>
+          <a:prstGeom prst="rect">
+            <a:avLst/>
+          </a:prstGeom>
+        </p:spPr>
+        <p:txBody>
+          <a:bodyPr wrap="none">
+            <a:spAutoFit/>
+          </a:bodyPr>
+          <a:lstStyle/>
+          <a:p>
+            <a:r>
+              <a:rPr lang="en-US" dirty="0" err="1"/>
+              <a:t>Bộ</a:t>
+            </a:r>
+            <a:r>
+              <a:rPr lang="en-US" dirty="0"/>
+              <a:t> </a:t>
+            </a:r>
+            <a:r>
+              <a:rPr lang="en-US" dirty="0" err="1"/>
+              <a:t>tiền</a:t>
+            </a:r>
+            <a:r>
+              <a:rPr lang="en-US" dirty="0"/>
+              <a:t> </a:t>
+            </a:r>
+            <a:r>
+              <a:rPr lang="en-US" dirty="0" err="1"/>
+              <a:t>xử</a:t>
+            </a:r>
+            <a:r>
+              <a:rPr lang="en-US" dirty="0"/>
+              <a:t> </a:t>
+            </a:r>
+            <a:r>
+              <a:rPr lang="en-US" dirty="0" err="1"/>
+              <a:t>lý</a:t>
+            </a:r>
+            <a:r>
+              <a:rPr lang="en-US" dirty="0"/>
+              <a:t> C (The C Preprocessor)</a:t>
+            </a:r>
+          </a:p>
+        </p:txBody>
+      </p:sp>
+      <p:sp>
+        <p:nvSpPr>
+          <p:cNvPr id="6" name="Rectangle 2"/>
+          <p:cNvSpPr>
+            <a:spLocks noChangeArrowheads="1"/>
+          </p:cNvSpPr>
+          <p:nvPr/>
+        </p:nvSpPr>
+        <p:spPr bwMode="auto">
+          <a:xfrm>
+            <a:off x="1088571" y="1713952"/>
+            <a:ext cx="6960047" cy="338554"/>
+          </a:xfrm>
+          <a:prstGeom prst="rect">
+            <a:avLst/>
+          </a:prstGeom>
+          <a:noFill/>
+          <a:ln>
+            <a:noFill/>
+          </a:ln>
+          <a:effectLst/>
+          <a:extLst>
+            <a:ext uri="{909E8E84-426E-40DD-AFC4-6F175D3DCCD1}">
+              <a14:hiddenFill xmlns:a14="http://schemas.microsoft.com/office/drawing/2010/main">
+                <a:solidFill>
+                  <a:schemeClr val="accent1"/>
+                </a:solidFill>
+              </a14:hiddenFill>
+            </a:ext>
+            <a:ext uri="{91240B29-F687-4F45-9708-019B960494DF}">
+              <a14:hiddenLine xmlns:a14="http://schemas.microsoft.com/office/drawing/2010/main" w="9525">
+                <a:solidFill>
+                  <a:schemeClr val="tx1"/>
+                </a:solidFill>
+                <a:miter lim="800000"/>
+                <a:headEnd/>
+                <a:tailEnd/>
+              </a14:hiddenLine>
+            </a:ext>
+            <a:ext uri="{AF507438-7753-43E0-B8FC-AC1667EBCBE1}">
+              <a14:hiddenEffects xmlns:a14="http://schemas.microsoft.com/office/drawing/2010/main">
+                <a:effectLst>
+                  <a:outerShdw dist="35921" dir="2700000" algn="ctr" rotWithShape="0">
+                    <a:schemeClr val="bg2"/>
+                  </a:outerShdw>
+                </a:effectLst>
+              </a14:hiddenEffects>
+            </a:ext>
+          </a:extLst>
+        </p:spPr>
+        <p:txBody>
+          <a:bodyPr vert="horz" wrap="none" lIns="91440" tIns="45720" rIns="91440" bIns="45720" numCol="1" anchor="ctr" anchorCtr="0" compatLnSpc="1">
+            <a:prstTxWarp prst="textNoShape">
+              <a:avLst/>
+            </a:prstTxWarp>
+            <a:spAutoFit/>
+          </a:bodyPr>
+          <a:lstStyle/>
+          <a:p>
+            <a:pPr marL="0" marR="0" lvl="0" indent="0" algn="l" defTabSz="914400" rtl="0" eaLnBrk="0" fontAlgn="base" latinLnBrk="0" hangingPunct="0">
+              <a:lnSpc>
+                <a:spcPct val="100000"/>
+              </a:lnSpc>
+              <a:spcBef>
+                <a:spcPct val="0"/>
+              </a:spcBef>
+              <a:spcAft>
+                <a:spcPct val="0"/>
+              </a:spcAft>
+              <a:buClrTx/>
+              <a:buSzTx/>
+              <a:buFontTx/>
+              <a:buNone/>
+              <a:tabLst/>
+            </a:pPr>
+            <a:r>
+              <a:rPr kumimoji="0" lang="en-US" altLang="en-US" sz="1600" b="0" i="0" u="none" strike="noStrike" cap="none" normalizeH="0" baseline="0" dirty="0" smtClean="0">
+                <a:ln>
+                  <a:noFill/>
+                </a:ln>
+                <a:solidFill>
+                  <a:schemeClr val="tx1"/>
+                </a:solidFill>
+                <a:effectLst/>
+                <a:latin typeface="Arial Unicode MS" panose="020B0604020202020204" pitchFamily="34" charset="-128"/>
+              </a:rPr>
+              <a:t>#include</a:t>
+            </a:r>
+            <a:r>
+              <a:rPr kumimoji="0" lang="en-US" altLang="en-US" sz="1600" b="0" i="0" u="none" strike="noStrike" cap="none" normalizeH="0" baseline="0" dirty="0" smtClean="0">
+                <a:ln>
+                  <a:noFill/>
+                </a:ln>
+                <a:solidFill>
+                  <a:schemeClr val="tx1"/>
+                </a:solidFill>
+                <a:effectLst/>
+              </a:rPr>
+              <a:t>: </a:t>
+            </a:r>
+            <a:r>
+              <a:rPr kumimoji="0" lang="en-US" altLang="en-US" sz="1600" b="0" i="0" u="none" strike="noStrike" cap="none" normalizeH="0" baseline="0" dirty="0" err="1" smtClean="0">
+                <a:ln>
+                  <a:noFill/>
+                </a:ln>
+                <a:solidFill>
+                  <a:schemeClr val="tx1"/>
+                </a:solidFill>
+                <a:effectLst/>
+              </a:rPr>
+              <a:t>chèn</a:t>
+            </a:r>
+            <a:r>
+              <a:rPr kumimoji="0" lang="en-US" altLang="en-US" sz="1600" b="0" i="0" u="none" strike="noStrike" cap="none" normalizeH="0" baseline="0" dirty="0" smtClean="0">
+                <a:ln>
+                  <a:noFill/>
+                </a:ln>
+                <a:solidFill>
+                  <a:schemeClr val="tx1"/>
+                </a:solidFill>
+                <a:effectLst/>
+              </a:rPr>
+              <a:t> </a:t>
+            </a:r>
+            <a:r>
+              <a:rPr kumimoji="0" lang="en-US" altLang="en-US" sz="1600" b="0" i="0" u="none" strike="noStrike" cap="none" normalizeH="0" baseline="0" dirty="0" err="1" smtClean="0">
+                <a:ln>
+                  <a:noFill/>
+                </a:ln>
+                <a:solidFill>
+                  <a:schemeClr val="tx1"/>
+                </a:solidFill>
+                <a:effectLst/>
+              </a:rPr>
+              <a:t>nội</a:t>
+            </a:r>
+            <a:r>
+              <a:rPr kumimoji="0" lang="en-US" altLang="en-US" sz="1600" b="0" i="0" u="none" strike="noStrike" cap="none" normalizeH="0" baseline="0" dirty="0" smtClean="0">
+                <a:ln>
+                  <a:noFill/>
+                </a:ln>
+                <a:solidFill>
+                  <a:schemeClr val="tx1"/>
+                </a:solidFill>
+                <a:effectLst/>
+              </a:rPr>
+              <a:t> dung </a:t>
+            </a:r>
+            <a:r>
+              <a:rPr kumimoji="0" lang="en-US" altLang="en-US" sz="1600" b="0" i="0" u="none" strike="noStrike" cap="none" normalizeH="0" baseline="0" dirty="0" err="1" smtClean="0">
+                <a:ln>
+                  <a:noFill/>
+                </a:ln>
+                <a:solidFill>
+                  <a:schemeClr val="tx1"/>
+                </a:solidFill>
+                <a:effectLst/>
+              </a:rPr>
+              <a:t>của</a:t>
+            </a:r>
+            <a:r>
+              <a:rPr kumimoji="0" lang="en-US" altLang="en-US" sz="1600" b="0" i="0" u="none" strike="noStrike" cap="none" normalizeH="0" baseline="0" dirty="0" smtClean="0">
+                <a:ln>
+                  <a:noFill/>
+                </a:ln>
+                <a:solidFill>
+                  <a:schemeClr val="tx1"/>
+                </a:solidFill>
+                <a:effectLst/>
+              </a:rPr>
+              <a:t> </a:t>
+            </a:r>
+            <a:r>
+              <a:rPr kumimoji="0" lang="en-US" altLang="en-US" sz="1600" b="0" i="0" u="none" strike="noStrike" cap="none" normalizeH="0" baseline="0" dirty="0" err="1" smtClean="0">
+                <a:ln>
+                  <a:noFill/>
+                </a:ln>
+                <a:solidFill>
+                  <a:schemeClr val="tx1"/>
+                </a:solidFill>
+                <a:effectLst/>
+              </a:rPr>
+              <a:t>một</a:t>
+            </a:r>
+            <a:r>
+              <a:rPr kumimoji="0" lang="en-US" altLang="en-US" sz="1600" b="0" i="0" u="none" strike="noStrike" cap="none" normalizeH="0" baseline="0" dirty="0" smtClean="0">
+                <a:ln>
+                  <a:noFill/>
+                </a:ln>
+                <a:solidFill>
+                  <a:schemeClr val="tx1"/>
+                </a:solidFill>
+                <a:effectLst/>
+              </a:rPr>
+              <a:t> </a:t>
+            </a:r>
+            <a:r>
+              <a:rPr kumimoji="0" lang="en-US" altLang="en-US" sz="1600" b="0" i="0" u="none" strike="noStrike" cap="none" normalizeH="0" baseline="0" dirty="0" err="1" smtClean="0">
+                <a:ln>
+                  <a:noFill/>
+                </a:ln>
+                <a:solidFill>
+                  <a:schemeClr val="tx1"/>
+                </a:solidFill>
+                <a:effectLst/>
+              </a:rPr>
+              <a:t>tệp</a:t>
+            </a:r>
+            <a:r>
+              <a:rPr kumimoji="0" lang="en-US" altLang="en-US" sz="1600" b="0" i="0" u="none" strike="noStrike" cap="none" normalizeH="0" baseline="0" dirty="0" smtClean="0">
+                <a:ln>
+                  <a:noFill/>
+                </a:ln>
+                <a:solidFill>
+                  <a:schemeClr val="tx1"/>
+                </a:solidFill>
+                <a:effectLst/>
+              </a:rPr>
+              <a:t> </a:t>
+            </a:r>
+            <a:r>
+              <a:rPr kumimoji="0" lang="en-US" altLang="en-US" sz="1600" b="0" i="0" u="none" strike="noStrike" cap="none" normalizeH="0" baseline="0" dirty="0" err="1" smtClean="0">
+                <a:ln>
+                  <a:noFill/>
+                </a:ln>
+                <a:solidFill>
+                  <a:schemeClr val="tx1"/>
+                </a:solidFill>
+                <a:effectLst/>
+              </a:rPr>
+              <a:t>vào</a:t>
+            </a:r>
+            <a:r>
+              <a:rPr kumimoji="0" lang="en-US" altLang="en-US" sz="1600" b="0" i="0" u="none" strike="noStrike" cap="none" normalizeH="0" baseline="0" dirty="0" smtClean="0">
+                <a:ln>
+                  <a:noFill/>
+                </a:ln>
+                <a:solidFill>
+                  <a:schemeClr val="tx1"/>
+                </a:solidFill>
+                <a:effectLst/>
+              </a:rPr>
+              <a:t> </a:t>
+            </a:r>
+            <a:r>
+              <a:rPr kumimoji="0" lang="en-US" altLang="en-US" sz="1600" b="0" i="0" u="none" strike="noStrike" cap="none" normalizeH="0" baseline="0" dirty="0" err="1" smtClean="0">
+                <a:ln>
+                  <a:noFill/>
+                </a:ln>
+                <a:solidFill>
+                  <a:schemeClr val="tx1"/>
+                </a:solidFill>
+                <a:effectLst/>
+              </a:rPr>
+              <a:t>chương</a:t>
+            </a:r>
+            <a:r>
+              <a:rPr kumimoji="0" lang="en-US" altLang="en-US" sz="1600" b="0" i="0" u="none" strike="noStrike" cap="none" normalizeH="0" baseline="0" dirty="0" smtClean="0">
+                <a:ln>
+                  <a:noFill/>
+                </a:ln>
+                <a:solidFill>
+                  <a:schemeClr val="tx1"/>
+                </a:solidFill>
+                <a:effectLst/>
+              </a:rPr>
+              <a:t> </a:t>
+            </a:r>
+            <a:r>
+              <a:rPr kumimoji="0" lang="en-US" altLang="en-US" sz="1600" b="0" i="0" u="none" strike="noStrike" cap="none" normalizeH="0" baseline="0" dirty="0" err="1" smtClean="0">
+                <a:ln>
+                  <a:noFill/>
+                </a:ln>
+                <a:solidFill>
+                  <a:schemeClr val="tx1"/>
+                </a:solidFill>
+                <a:effectLst/>
+              </a:rPr>
+              <a:t>trình</a:t>
+            </a:r>
+            <a:r>
+              <a:rPr kumimoji="0" lang="en-US" altLang="en-US" sz="1600" b="0" i="0" u="none" strike="noStrike" cap="none" normalizeH="0" baseline="0" dirty="0" smtClean="0">
+                <a:ln>
+                  <a:noFill/>
+                </a:ln>
+                <a:solidFill>
+                  <a:schemeClr val="tx1"/>
+                </a:solidFill>
+                <a:effectLst/>
+              </a:rPr>
+              <a:t> </a:t>
+            </a:r>
+            <a:r>
+              <a:rPr kumimoji="0" lang="en-US" altLang="en-US" sz="1600" b="0" i="0" u="none" strike="noStrike" cap="none" normalizeH="0" baseline="0" dirty="0" err="1" smtClean="0">
+                <a:ln>
+                  <a:noFill/>
+                </a:ln>
+                <a:solidFill>
+                  <a:schemeClr val="tx1"/>
+                </a:solidFill>
+                <a:effectLst/>
+              </a:rPr>
+              <a:t>trong</a:t>
+            </a:r>
+            <a:r>
+              <a:rPr kumimoji="0" lang="en-US" altLang="en-US" sz="1600" b="0" i="0" u="none" strike="noStrike" cap="none" normalizeH="0" baseline="0" dirty="0" smtClean="0">
+                <a:ln>
+                  <a:noFill/>
+                </a:ln>
+                <a:solidFill>
+                  <a:schemeClr val="tx1"/>
+                </a:solidFill>
+                <a:effectLst/>
+              </a:rPr>
+              <a:t> </a:t>
+            </a:r>
+            <a:r>
+              <a:rPr kumimoji="0" lang="en-US" altLang="en-US" sz="1600" b="0" i="0" u="none" strike="noStrike" cap="none" normalizeH="0" baseline="0" dirty="0" err="1" smtClean="0">
+                <a:ln>
+                  <a:noFill/>
+                </a:ln>
+                <a:solidFill>
+                  <a:schemeClr val="tx1"/>
+                </a:solidFill>
+                <a:effectLst/>
+              </a:rPr>
+              <a:t>quá</a:t>
+            </a:r>
+            <a:r>
+              <a:rPr kumimoji="0" lang="en-US" altLang="en-US" sz="1600" b="0" i="0" u="none" strike="noStrike" cap="none" normalizeH="0" baseline="0" dirty="0" smtClean="0">
+                <a:ln>
+                  <a:noFill/>
+                </a:ln>
+                <a:solidFill>
+                  <a:schemeClr val="tx1"/>
+                </a:solidFill>
+                <a:effectLst/>
+              </a:rPr>
+              <a:t> </a:t>
+            </a:r>
+            <a:r>
+              <a:rPr kumimoji="0" lang="en-US" altLang="en-US" sz="1600" b="0" i="0" u="none" strike="noStrike" cap="none" normalizeH="0" baseline="0" dirty="0" err="1" smtClean="0">
+                <a:ln>
+                  <a:noFill/>
+                </a:ln>
+                <a:solidFill>
+                  <a:schemeClr val="tx1"/>
+                </a:solidFill>
+                <a:effectLst/>
+              </a:rPr>
+              <a:t>trình</a:t>
+            </a:r>
+            <a:r>
+              <a:rPr kumimoji="0" lang="en-US" altLang="en-US" sz="1600" b="0" i="0" u="none" strike="noStrike" cap="none" normalizeH="0" baseline="0" dirty="0" smtClean="0">
+                <a:ln>
+                  <a:noFill/>
+                </a:ln>
+                <a:solidFill>
+                  <a:schemeClr val="tx1"/>
+                </a:solidFill>
+                <a:effectLst/>
+              </a:rPr>
+              <a:t> </a:t>
+            </a:r>
+            <a:r>
+              <a:rPr kumimoji="0" lang="en-US" altLang="en-US" sz="1600" b="0" i="0" u="none" strike="noStrike" cap="none" normalizeH="0" baseline="0" dirty="0" err="1" smtClean="0">
+                <a:ln>
+                  <a:noFill/>
+                </a:ln>
+                <a:solidFill>
+                  <a:schemeClr val="tx1"/>
+                </a:solidFill>
+                <a:effectLst/>
+              </a:rPr>
+              <a:t>biên</a:t>
+            </a:r>
+            <a:r>
+              <a:rPr kumimoji="0" lang="en-US" altLang="en-US" sz="1600" b="0" i="0" u="none" strike="noStrike" cap="none" normalizeH="0" baseline="0" dirty="0" smtClean="0">
+                <a:ln>
+                  <a:noFill/>
+                </a:ln>
+                <a:solidFill>
+                  <a:schemeClr val="tx1"/>
+                </a:solidFill>
+                <a:effectLst/>
+              </a:rPr>
+              <a:t> </a:t>
+            </a:r>
+            <a:r>
+              <a:rPr kumimoji="0" lang="en-US" altLang="en-US" sz="1600" b="0" i="0" u="none" strike="noStrike" cap="none" normalizeH="0" baseline="0" dirty="0" err="1" smtClean="0">
+                <a:ln>
+                  <a:noFill/>
+                </a:ln>
+                <a:solidFill>
+                  <a:schemeClr val="tx1"/>
+                </a:solidFill>
+                <a:effectLst/>
+              </a:rPr>
+              <a:t>dịch</a:t>
+            </a:r>
+            <a:r>
+              <a:rPr kumimoji="0" lang="en-US" altLang="en-US" sz="1600" b="0" i="0" u="none" strike="noStrike" cap="none" normalizeH="0" baseline="0" dirty="0" smtClean="0">
+                <a:ln>
+                  <a:noFill/>
+                </a:ln>
+                <a:solidFill>
+                  <a:schemeClr val="tx1"/>
+                </a:solidFill>
+                <a:effectLst/>
+              </a:rPr>
+              <a:t>. </a:t>
+            </a:r>
+            <a:endParaRPr kumimoji="0" lang="en-US" altLang="en-US" sz="1600" b="0" i="0" u="none" strike="noStrike" cap="none" normalizeH="0" baseline="0" dirty="0" smtClean="0">
+              <a:ln>
+                <a:noFill/>
+              </a:ln>
+              <a:solidFill>
+                <a:schemeClr val="tx1"/>
+              </a:solidFill>
+              <a:effectLst/>
+              <a:latin typeface="Arial" panose="020B0604020202020204" pitchFamily="34" charset="0"/>
+            </a:endParaRPr>
+          </a:p>
+        </p:txBody>
+      </p:sp>
+      <p:sp>
+        <p:nvSpPr>
+          <p:cNvPr id="7" name="Rectangle 6"/>
+          <p:cNvSpPr/>
+          <p:nvPr/>
+        </p:nvSpPr>
+        <p:spPr>
+          <a:xfrm>
+            <a:off x="1368087" y="1221572"/>
+            <a:ext cx="5397631" cy="369332"/>
+          </a:xfrm>
+          <a:prstGeom prst="rect">
+            <a:avLst/>
+          </a:prstGeom>
+        </p:spPr>
+        <p:txBody>
+          <a:bodyPr wrap="none">
+            <a:spAutoFit/>
+          </a:bodyPr>
+          <a:lstStyle/>
+          <a:p>
+            <a:r>
+              <a:rPr lang="vi-VN" dirty="0"/>
+              <a:t>Hai tính năng được sử dụng thường xuyên nhất là:</a:t>
+            </a:r>
+            <a:endParaRPr lang="en-US" dirty="0"/>
+          </a:p>
+        </p:txBody>
+      </p:sp>
+      <p:sp>
+        <p:nvSpPr>
+          <p:cNvPr id="8" name="Rectangle 3"/>
+          <p:cNvSpPr>
+            <a:spLocks noChangeArrowheads="1"/>
+          </p:cNvSpPr>
+          <p:nvPr/>
+        </p:nvSpPr>
+        <p:spPr bwMode="auto">
+          <a:xfrm>
+            <a:off x="1088571" y="2131620"/>
+            <a:ext cx="4910062" cy="338554"/>
+          </a:xfrm>
+          <a:prstGeom prst="rect">
+            <a:avLst/>
+          </a:prstGeom>
+          <a:noFill/>
+          <a:ln>
+            <a:noFill/>
+          </a:ln>
+          <a:effectLst/>
+          <a:extLst>
+            <a:ext uri="{909E8E84-426E-40DD-AFC4-6F175D3DCCD1}">
+              <a14:hiddenFill xmlns:a14="http://schemas.microsoft.com/office/drawing/2010/main">
+                <a:solidFill>
+                  <a:schemeClr val="accent1"/>
+                </a:solidFill>
+              </a14:hiddenFill>
+            </a:ext>
+            <a:ext uri="{91240B29-F687-4F45-9708-019B960494DF}">
+              <a14:hiddenLine xmlns:a14="http://schemas.microsoft.com/office/drawing/2010/main" w="9525">
+                <a:solidFill>
+                  <a:schemeClr val="tx1"/>
+                </a:solidFill>
+                <a:miter lim="800000"/>
+                <a:headEnd/>
+                <a:tailEnd/>
+              </a14:hiddenLine>
+            </a:ext>
+            <a:ext uri="{AF507438-7753-43E0-B8FC-AC1667EBCBE1}">
+              <a14:hiddenEffects xmlns:a14="http://schemas.microsoft.com/office/drawing/2010/main">
+                <a:effectLst>
+                  <a:outerShdw dist="35921" dir="2700000" algn="ctr" rotWithShape="0">
+                    <a:schemeClr val="bg2"/>
+                  </a:outerShdw>
+                </a:effectLst>
+              </a14:hiddenEffects>
+            </a:ext>
+          </a:extLst>
+        </p:spPr>
+        <p:txBody>
+          <a:bodyPr vert="horz" wrap="none" lIns="91440" tIns="45720" rIns="91440" bIns="45720" numCol="1" anchor="ctr" anchorCtr="0" compatLnSpc="1">
+            <a:prstTxWarp prst="textNoShape">
+              <a:avLst/>
+            </a:prstTxWarp>
+            <a:spAutoFit/>
+          </a:bodyPr>
+          <a:lstStyle/>
+          <a:p>
+            <a:pPr marL="0" marR="0" lvl="0" indent="0" algn="l" defTabSz="914400" rtl="0" eaLnBrk="0" fontAlgn="base" latinLnBrk="0" hangingPunct="0">
+              <a:lnSpc>
+                <a:spcPct val="100000"/>
+              </a:lnSpc>
+              <a:spcBef>
+                <a:spcPct val="0"/>
+              </a:spcBef>
+              <a:spcAft>
+                <a:spcPct val="0"/>
+              </a:spcAft>
+              <a:buClrTx/>
+              <a:buSzTx/>
+              <a:buFontTx/>
+              <a:buNone/>
+              <a:tabLst/>
+            </a:pPr>
+            <a:r>
+              <a:rPr kumimoji="0" lang="en-US" altLang="en-US" sz="1600" b="0" i="0" u="none" strike="noStrike" cap="none" normalizeH="0" baseline="0" dirty="0" smtClean="0">
+                <a:ln>
+                  <a:noFill/>
+                </a:ln>
+                <a:solidFill>
+                  <a:schemeClr val="tx1"/>
+                </a:solidFill>
+                <a:effectLst/>
+                <a:latin typeface="Arial Unicode MS" panose="020B0604020202020204" pitchFamily="34" charset="-128"/>
+              </a:rPr>
+              <a:t>#define</a:t>
+            </a:r>
+            <a:r>
+              <a:rPr kumimoji="0" lang="en-US" altLang="en-US" sz="1600" b="0" i="0" u="none" strike="noStrike" cap="none" normalizeH="0" baseline="0" dirty="0" smtClean="0">
+                <a:ln>
+                  <a:noFill/>
+                </a:ln>
+                <a:solidFill>
+                  <a:schemeClr val="tx1"/>
+                </a:solidFill>
+                <a:effectLst/>
+              </a:rPr>
+              <a:t>: </a:t>
+            </a:r>
+            <a:r>
+              <a:rPr kumimoji="0" lang="en-US" altLang="en-US" sz="1600" b="0" i="0" u="none" strike="noStrike" cap="none" normalizeH="0" baseline="0" dirty="0" err="1" smtClean="0">
+                <a:ln>
+                  <a:noFill/>
+                </a:ln>
+                <a:solidFill>
+                  <a:schemeClr val="tx1"/>
+                </a:solidFill>
+                <a:effectLst/>
+              </a:rPr>
+              <a:t>thay</a:t>
+            </a:r>
+            <a:r>
+              <a:rPr kumimoji="0" lang="en-US" altLang="en-US" sz="1600" b="0" i="0" u="none" strike="noStrike" cap="none" normalizeH="0" baseline="0" dirty="0" smtClean="0">
+                <a:ln>
+                  <a:noFill/>
+                </a:ln>
+                <a:solidFill>
+                  <a:schemeClr val="tx1"/>
+                </a:solidFill>
+                <a:effectLst/>
+              </a:rPr>
+              <a:t> </a:t>
+            </a:r>
+            <a:r>
+              <a:rPr kumimoji="0" lang="en-US" altLang="en-US" sz="1600" b="0" i="0" u="none" strike="noStrike" cap="none" normalizeH="0" baseline="0" dirty="0" err="1" smtClean="0">
+                <a:ln>
+                  <a:noFill/>
+                </a:ln>
+                <a:solidFill>
+                  <a:schemeClr val="tx1"/>
+                </a:solidFill>
+                <a:effectLst/>
+              </a:rPr>
+              <a:t>thế</a:t>
+            </a:r>
+            <a:r>
+              <a:rPr kumimoji="0" lang="en-US" altLang="en-US" sz="1600" b="0" i="0" u="none" strike="noStrike" cap="none" normalizeH="0" baseline="0" dirty="0" smtClean="0">
+                <a:ln>
+                  <a:noFill/>
+                </a:ln>
+                <a:solidFill>
+                  <a:schemeClr val="tx1"/>
+                </a:solidFill>
+                <a:effectLst/>
+              </a:rPr>
+              <a:t> </a:t>
+            </a:r>
+            <a:r>
+              <a:rPr kumimoji="0" lang="en-US" altLang="en-US" sz="1600" b="0" i="0" u="none" strike="noStrike" cap="none" normalizeH="0" baseline="0" dirty="0" err="1" smtClean="0">
+                <a:ln>
+                  <a:noFill/>
+                </a:ln>
+                <a:solidFill>
+                  <a:schemeClr val="tx1"/>
+                </a:solidFill>
+                <a:effectLst/>
+              </a:rPr>
+              <a:t>một</a:t>
+            </a:r>
+            <a:r>
+              <a:rPr kumimoji="0" lang="en-US" altLang="en-US" sz="1600" b="0" i="0" u="none" strike="noStrike" cap="none" normalizeH="0" baseline="0" dirty="0" smtClean="0">
+                <a:ln>
+                  <a:noFill/>
+                </a:ln>
+                <a:solidFill>
+                  <a:schemeClr val="tx1"/>
+                </a:solidFill>
+                <a:effectLst/>
+              </a:rPr>
+              <a:t> token </a:t>
+            </a:r>
+            <a:r>
+              <a:rPr kumimoji="0" lang="en-US" altLang="en-US" sz="1600" b="0" i="0" u="none" strike="noStrike" cap="none" normalizeH="0" baseline="0" dirty="0" err="1" smtClean="0">
+                <a:ln>
+                  <a:noFill/>
+                </a:ln>
+                <a:solidFill>
+                  <a:schemeClr val="tx1"/>
+                </a:solidFill>
+                <a:effectLst/>
+              </a:rPr>
+              <a:t>bằng</a:t>
+            </a:r>
+            <a:r>
+              <a:rPr kumimoji="0" lang="en-US" altLang="en-US" sz="1600" b="0" i="0" u="none" strike="noStrike" cap="none" normalizeH="0" baseline="0" dirty="0" smtClean="0">
+                <a:ln>
+                  <a:noFill/>
+                </a:ln>
+                <a:solidFill>
+                  <a:schemeClr val="tx1"/>
+                </a:solidFill>
+                <a:effectLst/>
+              </a:rPr>
+              <a:t> </a:t>
+            </a:r>
+            <a:r>
+              <a:rPr kumimoji="0" lang="en-US" altLang="en-US" sz="1600" b="0" i="0" u="none" strike="noStrike" cap="none" normalizeH="0" baseline="0" dirty="0" err="1" smtClean="0">
+                <a:ln>
+                  <a:noFill/>
+                </a:ln>
+                <a:solidFill>
+                  <a:schemeClr val="tx1"/>
+                </a:solidFill>
+                <a:effectLst/>
+              </a:rPr>
+              <a:t>một</a:t>
+            </a:r>
+            <a:r>
+              <a:rPr kumimoji="0" lang="en-US" altLang="en-US" sz="1600" b="0" i="0" u="none" strike="noStrike" cap="none" normalizeH="0" baseline="0" dirty="0" smtClean="0">
+                <a:ln>
+                  <a:noFill/>
+                </a:ln>
+                <a:solidFill>
+                  <a:schemeClr val="tx1"/>
+                </a:solidFill>
+                <a:effectLst/>
+              </a:rPr>
+              <a:t> </a:t>
+            </a:r>
+            <a:r>
+              <a:rPr kumimoji="0" lang="en-US" altLang="en-US" sz="1600" b="0" i="0" u="none" strike="noStrike" cap="none" normalizeH="0" baseline="0" dirty="0" err="1" smtClean="0">
+                <a:ln>
+                  <a:noFill/>
+                </a:ln>
+                <a:solidFill>
+                  <a:schemeClr val="tx1"/>
+                </a:solidFill>
+                <a:effectLst/>
+              </a:rPr>
+              <a:t>chuỗi</a:t>
+            </a:r>
+            <a:r>
+              <a:rPr kumimoji="0" lang="en-US" altLang="en-US" sz="1600" b="0" i="0" u="none" strike="noStrike" cap="none" normalizeH="0" baseline="0" dirty="0" smtClean="0">
+                <a:ln>
+                  <a:noFill/>
+                </a:ln>
+                <a:solidFill>
+                  <a:schemeClr val="tx1"/>
+                </a:solidFill>
+                <a:effectLst/>
+              </a:rPr>
+              <a:t> </a:t>
+            </a:r>
+            <a:r>
+              <a:rPr kumimoji="0" lang="en-US" altLang="en-US" sz="1600" b="0" i="0" u="none" strike="noStrike" cap="none" normalizeH="0" baseline="0" dirty="0" err="1" smtClean="0">
+                <a:ln>
+                  <a:noFill/>
+                </a:ln>
+                <a:solidFill>
+                  <a:schemeClr val="tx1"/>
+                </a:solidFill>
+                <a:effectLst/>
+              </a:rPr>
+              <a:t>ký</a:t>
+            </a:r>
+            <a:r>
+              <a:rPr kumimoji="0" lang="en-US" altLang="en-US" sz="1600" b="0" i="0" u="none" strike="noStrike" cap="none" normalizeH="0" baseline="0" dirty="0" smtClean="0">
+                <a:ln>
+                  <a:noFill/>
+                </a:ln>
+                <a:solidFill>
+                  <a:schemeClr val="tx1"/>
+                </a:solidFill>
+                <a:effectLst/>
+              </a:rPr>
+              <a:t> </a:t>
+            </a:r>
+            <a:r>
+              <a:rPr kumimoji="0" lang="en-US" altLang="en-US" sz="1600" b="0" i="0" u="none" strike="noStrike" cap="none" normalizeH="0" baseline="0" dirty="0" err="1" smtClean="0">
+                <a:ln>
+                  <a:noFill/>
+                </a:ln>
+                <a:solidFill>
+                  <a:schemeClr val="tx1"/>
+                </a:solidFill>
+                <a:effectLst/>
+              </a:rPr>
+              <a:t>tự</a:t>
+            </a:r>
+            <a:r>
+              <a:rPr kumimoji="0" lang="en-US" altLang="en-US" sz="1600" b="0" i="0" u="none" strike="noStrike" cap="none" normalizeH="0" baseline="0" dirty="0" smtClean="0">
+                <a:ln>
+                  <a:noFill/>
+                </a:ln>
+                <a:solidFill>
+                  <a:schemeClr val="tx1"/>
+                </a:solidFill>
+                <a:effectLst/>
+              </a:rPr>
+              <a:t> </a:t>
+            </a:r>
+            <a:r>
+              <a:rPr kumimoji="0" lang="en-US" altLang="en-US" sz="1600" b="0" i="0" u="none" strike="noStrike" cap="none" normalizeH="0" baseline="0" dirty="0" err="1" smtClean="0">
+                <a:ln>
+                  <a:noFill/>
+                </a:ln>
+                <a:solidFill>
+                  <a:schemeClr val="tx1"/>
+                </a:solidFill>
+                <a:effectLst/>
+              </a:rPr>
+              <a:t>tùy</a:t>
+            </a:r>
+            <a:r>
+              <a:rPr kumimoji="0" lang="en-US" altLang="en-US" sz="1600" b="0" i="0" u="none" strike="noStrike" cap="none" normalizeH="0" baseline="0" dirty="0" smtClean="0">
+                <a:ln>
+                  <a:noFill/>
+                </a:ln>
+                <a:solidFill>
+                  <a:schemeClr val="tx1"/>
+                </a:solidFill>
+                <a:effectLst/>
+              </a:rPr>
+              <a:t> ý. </a:t>
+            </a:r>
+            <a:endParaRPr kumimoji="0" lang="en-US" altLang="en-US" sz="1600" b="0" i="0" u="none" strike="noStrike" cap="none" normalizeH="0" baseline="0" dirty="0" smtClean="0">
+              <a:ln>
+                <a:noFill/>
+              </a:ln>
+              <a:solidFill>
+                <a:schemeClr val="tx1"/>
+              </a:solidFill>
+              <a:effectLst/>
+              <a:latin typeface="Arial" panose="020B0604020202020204" pitchFamily="34" charset="0"/>
+            </a:endParaRPr>
+          </a:p>
+        </p:txBody>
+      </p:sp>
+      <p:sp>
+        <p:nvSpPr>
+          <p:cNvPr id="9" name="Rectangle 8"/>
+          <p:cNvSpPr/>
+          <p:nvPr/>
+        </p:nvSpPr>
+        <p:spPr>
+          <a:xfrm>
+            <a:off x="1368087" y="2608610"/>
+            <a:ext cx="6096000" cy="646331"/>
+          </a:xfrm>
+          <a:prstGeom prst="rect">
+            <a:avLst/>
+          </a:prstGeom>
+        </p:spPr>
+        <p:txBody>
+          <a:bodyPr>
+            <a:spAutoFit/>
+          </a:bodyPr>
+          <a:lstStyle/>
+          <a:p>
+            <a:r>
+              <a:rPr lang="en-US" b="1" dirty="0" smtClean="0">
+                <a:solidFill>
+                  <a:srgbClr val="000000"/>
+                </a:solidFill>
+                <a:latin typeface="Helvetica-Bold"/>
+              </a:rPr>
+              <a:t>1. File </a:t>
+            </a:r>
+            <a:r>
+              <a:rPr lang="en-US" b="1" dirty="0">
+                <a:solidFill>
+                  <a:srgbClr val="000000"/>
+                </a:solidFill>
+                <a:latin typeface="Helvetica-Bold"/>
+              </a:rPr>
+              <a:t>Inclusion</a:t>
+            </a:r>
+            <a:r>
+              <a:rPr lang="en-US" dirty="0"/>
+              <a:t> </a:t>
+            </a:r>
+            <a:br>
+              <a:rPr lang="en-US" dirty="0"/>
+            </a:br>
+            <a:endParaRPr lang="en-US" dirty="0"/>
+          </a:p>
+        </p:txBody>
+      </p:sp>
+      <p:pic>
+        <p:nvPicPr>
+          <p:cNvPr id="10" name="Picture 9"/>
+          <p:cNvPicPr>
+            <a:picLocks noChangeAspect="1"/>
+          </p:cNvPicPr>
+          <p:nvPr/>
+        </p:nvPicPr>
+        <p:blipFill>
+          <a:blip r:embed="rId2"/>
+          <a:stretch>
+            <a:fillRect/>
+          </a:stretch>
+        </p:blipFill>
+        <p:spPr>
+          <a:xfrm>
+            <a:off x="1809162" y="3198087"/>
+            <a:ext cx="2257740" cy="390580"/>
+          </a:xfrm>
+          <a:prstGeom prst="rect">
+            <a:avLst/>
+          </a:prstGeom>
+        </p:spPr>
+      </p:pic>
+      <p:pic>
+        <p:nvPicPr>
+          <p:cNvPr id="11" name="Picture 10"/>
+          <p:cNvPicPr>
+            <a:picLocks noChangeAspect="1"/>
+          </p:cNvPicPr>
+          <p:nvPr/>
+        </p:nvPicPr>
+        <p:blipFill>
+          <a:blip r:embed="rId3"/>
+          <a:stretch>
+            <a:fillRect/>
+          </a:stretch>
+        </p:blipFill>
+        <p:spPr>
+          <a:xfrm>
+            <a:off x="1675793" y="4454326"/>
+            <a:ext cx="2391109" cy="438211"/>
+          </a:xfrm>
+          <a:prstGeom prst="rect">
+            <a:avLst/>
+          </a:prstGeom>
+        </p:spPr>
+      </p:pic>
+      <p:sp>
+        <p:nvSpPr>
+          <p:cNvPr id="12" name="Rectangle 11"/>
+          <p:cNvSpPr/>
+          <p:nvPr/>
+        </p:nvSpPr>
+        <p:spPr>
+          <a:xfrm>
+            <a:off x="1602377" y="3641021"/>
+            <a:ext cx="6096000" cy="923330"/>
+          </a:xfrm>
+          <a:prstGeom prst="rect">
+            <a:avLst/>
+          </a:prstGeom>
+        </p:spPr>
+        <p:txBody>
+          <a:bodyPr>
+            <a:spAutoFit/>
+          </a:bodyPr>
+          <a:lstStyle/>
+          <a:p>
+            <a:r>
+              <a:rPr lang="vi-VN" dirty="0"/>
+              <a:t>việc tìm kiếm tệp thường bắt đầu từ thư mục chứa chương trình nguồn</a:t>
+            </a:r>
+            <a:r>
+              <a:rPr lang="vi-VN" dirty="0" smtClean="0"/>
+              <a:t>.</a:t>
+            </a:r>
+            <a:r>
+              <a:rPr lang="en-US" dirty="0" smtClean="0"/>
+              <a:t> </a:t>
+            </a:r>
+            <a:r>
+              <a:rPr lang="en-US" dirty="0" err="1" smtClean="0"/>
+              <a:t>Nếu</a:t>
+            </a:r>
+            <a:r>
+              <a:rPr lang="en-US" dirty="0" smtClean="0"/>
+              <a:t> </a:t>
+            </a:r>
+            <a:r>
+              <a:rPr lang="en-US" dirty="0" err="1" smtClean="0"/>
+              <a:t>không</a:t>
+            </a:r>
+            <a:r>
+              <a:rPr lang="en-US" dirty="0" smtClean="0"/>
+              <a:t> </a:t>
+            </a:r>
+            <a:r>
+              <a:rPr lang="en-US" dirty="0" err="1" smtClean="0"/>
+              <a:t>tìm</a:t>
+            </a:r>
+            <a:r>
+              <a:rPr lang="en-US" dirty="0" smtClean="0"/>
+              <a:t> </a:t>
+            </a:r>
+            <a:r>
+              <a:rPr lang="en-US" dirty="0" err="1" smtClean="0"/>
+              <a:t>thấy</a:t>
+            </a:r>
+            <a:r>
+              <a:rPr lang="en-US" dirty="0" smtClean="0"/>
+              <a:t> </a:t>
+            </a:r>
+            <a:r>
+              <a:rPr lang="en-US" dirty="0" err="1" smtClean="0"/>
+              <a:t>thì</a:t>
+            </a:r>
+            <a:r>
+              <a:rPr lang="en-US" dirty="0" smtClean="0"/>
+              <a:t> </a:t>
+            </a:r>
+            <a:r>
+              <a:rPr lang="en-US" dirty="0" err="1" smtClean="0"/>
+              <a:t>tìm</a:t>
+            </a:r>
+            <a:r>
+              <a:rPr lang="en-US" dirty="0" smtClean="0"/>
+              <a:t> </a:t>
+            </a:r>
+            <a:r>
+              <a:rPr lang="en-US" dirty="0" err="1" smtClean="0"/>
+              <a:t>theo</a:t>
+            </a:r>
+            <a:r>
+              <a:rPr lang="en-US" dirty="0" smtClean="0"/>
+              <a:t> </a:t>
+            </a:r>
+            <a:r>
+              <a:rPr lang="en-US" dirty="0" err="1" smtClean="0"/>
+              <a:t>quy</a:t>
+            </a:r>
+            <a:r>
+              <a:rPr lang="en-US" dirty="0" smtClean="0"/>
+              <a:t> </a:t>
+            </a:r>
+            <a:r>
+              <a:rPr lang="en-US" dirty="0" err="1" smtClean="0"/>
+              <a:t>tác</a:t>
+            </a:r>
+            <a:r>
+              <a:rPr lang="en-US" dirty="0" smtClean="0"/>
+              <a:t> </a:t>
+            </a:r>
+            <a:r>
+              <a:rPr lang="en-US" dirty="0" err="1" smtClean="0"/>
+              <a:t>của</a:t>
+            </a:r>
+            <a:r>
+              <a:rPr lang="en-US" dirty="0" smtClean="0"/>
+              <a:t> </a:t>
+            </a:r>
+            <a:r>
+              <a:rPr lang="en-US" dirty="0" err="1" smtClean="0"/>
+              <a:t>trình</a:t>
+            </a:r>
+            <a:r>
+              <a:rPr lang="en-US" dirty="0" smtClean="0"/>
+              <a:t> </a:t>
+            </a:r>
+            <a:r>
+              <a:rPr lang="en-US" dirty="0" err="1" smtClean="0"/>
+              <a:t>biên</a:t>
+            </a:r>
+            <a:r>
+              <a:rPr lang="en-US" dirty="0" smtClean="0"/>
+              <a:t> </a:t>
+            </a:r>
+            <a:r>
+              <a:rPr lang="en-US" dirty="0" err="1" smtClean="0"/>
+              <a:t>dịch</a:t>
+            </a:r>
+            <a:r>
+              <a:rPr lang="en-US" dirty="0" smtClean="0"/>
+              <a:t> </a:t>
+            </a:r>
+            <a:r>
+              <a:rPr lang="en-US" dirty="0" err="1" smtClean="0"/>
+              <a:t>hoặc</a:t>
+            </a:r>
+            <a:r>
+              <a:rPr lang="en-US" dirty="0" smtClean="0"/>
+              <a:t> </a:t>
+            </a:r>
+            <a:r>
+              <a:rPr lang="en-US" dirty="0" err="1" smtClean="0"/>
+              <a:t>hệ</a:t>
+            </a:r>
+            <a:r>
+              <a:rPr lang="en-US" dirty="0" smtClean="0"/>
+              <a:t> </a:t>
+            </a:r>
+            <a:r>
+              <a:rPr lang="en-US" dirty="0" err="1" smtClean="0"/>
+              <a:t>thống</a:t>
+            </a:r>
+            <a:r>
+              <a:rPr lang="en-US" dirty="0" smtClean="0"/>
+              <a:t> </a:t>
+            </a:r>
+            <a:r>
+              <a:rPr lang="en-US" dirty="0" err="1" smtClean="0"/>
+              <a:t>cài</a:t>
+            </a:r>
+            <a:r>
+              <a:rPr lang="en-US" dirty="0" smtClean="0"/>
+              <a:t> </a:t>
+            </a:r>
+            <a:r>
+              <a:rPr lang="en-US" dirty="0" err="1" smtClean="0"/>
+              <a:t>đặt</a:t>
+            </a:r>
+            <a:r>
+              <a:rPr lang="en-US" dirty="0" smtClean="0"/>
+              <a:t>.</a:t>
+            </a:r>
+            <a:endParaRPr lang="en-US" dirty="0"/>
+          </a:p>
+        </p:txBody>
+      </p:sp>
+      <p:sp>
+        <p:nvSpPr>
+          <p:cNvPr id="13" name="Rectangle 12"/>
+          <p:cNvSpPr/>
+          <p:nvPr/>
+        </p:nvSpPr>
+        <p:spPr>
+          <a:xfrm>
+            <a:off x="1675793" y="4892537"/>
+            <a:ext cx="6096000" cy="646331"/>
+          </a:xfrm>
+          <a:prstGeom prst="rect">
+            <a:avLst/>
+          </a:prstGeom>
+        </p:spPr>
+        <p:txBody>
+          <a:bodyPr>
+            <a:spAutoFit/>
+          </a:bodyPr>
+          <a:lstStyle/>
+          <a:p>
+            <a:r>
+              <a:rPr lang="en-US" dirty="0" err="1"/>
+              <a:t>việc</a:t>
+            </a:r>
+            <a:r>
+              <a:rPr lang="en-US" dirty="0"/>
+              <a:t> </a:t>
+            </a:r>
+            <a:r>
+              <a:rPr lang="en-US" dirty="0" err="1"/>
+              <a:t>tìm</a:t>
+            </a:r>
+            <a:r>
+              <a:rPr lang="en-US" dirty="0"/>
+              <a:t> </a:t>
+            </a:r>
+            <a:r>
+              <a:rPr lang="en-US" dirty="0" err="1"/>
+              <a:t>kiếm</a:t>
+            </a:r>
+            <a:r>
+              <a:rPr lang="en-US" dirty="0"/>
+              <a:t> </a:t>
+            </a:r>
+            <a:r>
+              <a:rPr lang="en-US" dirty="0" err="1"/>
+              <a:t>sẽ</a:t>
+            </a:r>
+            <a:r>
+              <a:rPr lang="en-US" dirty="0"/>
+              <a:t> </a:t>
+            </a:r>
+            <a:r>
+              <a:rPr lang="en-US" dirty="0" err="1"/>
+              <a:t>tuân</a:t>
+            </a:r>
+            <a:r>
+              <a:rPr lang="en-US" dirty="0"/>
+              <a:t> </a:t>
+            </a:r>
+            <a:r>
+              <a:rPr lang="en-US" dirty="0" err="1"/>
+              <a:t>theo</a:t>
+            </a:r>
+            <a:r>
+              <a:rPr lang="en-US" dirty="0"/>
+              <a:t> </a:t>
+            </a:r>
+            <a:r>
+              <a:rPr lang="en-US" dirty="0" err="1"/>
+              <a:t>các</a:t>
+            </a:r>
+            <a:r>
+              <a:rPr lang="en-US" dirty="0"/>
+              <a:t> </a:t>
+            </a:r>
+            <a:r>
+              <a:rPr lang="en-US" dirty="0" err="1"/>
+              <a:t>quy</a:t>
+            </a:r>
+            <a:r>
+              <a:rPr lang="en-US" dirty="0"/>
+              <a:t> </a:t>
+            </a:r>
+            <a:r>
+              <a:rPr lang="en-US" dirty="0" err="1"/>
+              <a:t>tắc</a:t>
+            </a:r>
+            <a:r>
+              <a:rPr lang="en-US" dirty="0"/>
+              <a:t> do </a:t>
+            </a:r>
+            <a:r>
+              <a:rPr lang="en-US" dirty="0" err="1"/>
+              <a:t>trình</a:t>
+            </a:r>
+            <a:r>
+              <a:rPr lang="en-US" dirty="0"/>
+              <a:t> </a:t>
+            </a:r>
+            <a:r>
+              <a:rPr lang="en-US" dirty="0" err="1"/>
+              <a:t>biên</a:t>
+            </a:r>
+            <a:r>
+              <a:rPr lang="en-US" dirty="0"/>
+              <a:t> </a:t>
+            </a:r>
+            <a:r>
+              <a:rPr lang="en-US" dirty="0" err="1"/>
+              <a:t>dịch</a:t>
+            </a:r>
+            <a:r>
+              <a:rPr lang="en-US" dirty="0"/>
+              <a:t> </a:t>
+            </a:r>
+            <a:r>
+              <a:rPr lang="en-US" dirty="0" err="1"/>
+              <a:t>hoặc</a:t>
+            </a:r>
+            <a:r>
+              <a:rPr lang="en-US" dirty="0"/>
+              <a:t> </a:t>
+            </a:r>
+            <a:r>
+              <a:rPr lang="en-US" dirty="0" err="1"/>
+              <a:t>hệ</a:t>
+            </a:r>
+            <a:r>
+              <a:rPr lang="en-US" dirty="0"/>
+              <a:t> </a:t>
+            </a:r>
+            <a:r>
+              <a:rPr lang="en-US" dirty="0" err="1"/>
+              <a:t>thống</a:t>
+            </a:r>
+            <a:r>
+              <a:rPr lang="en-US" dirty="0"/>
+              <a:t> </a:t>
+            </a:r>
+            <a:r>
+              <a:rPr lang="en-US" dirty="0" err="1"/>
+              <a:t>cài</a:t>
+            </a:r>
+            <a:r>
+              <a:rPr lang="en-US" dirty="0"/>
+              <a:t> </a:t>
+            </a:r>
+            <a:r>
+              <a:rPr lang="en-US" dirty="0" err="1"/>
+              <a:t>đặt</a:t>
+            </a:r>
+            <a:r>
+              <a:rPr lang="en-US" dirty="0"/>
+              <a:t> </a:t>
+            </a:r>
+            <a:r>
+              <a:rPr lang="en-US" dirty="0" err="1"/>
+              <a:t>quy</a:t>
+            </a:r>
+            <a:r>
+              <a:rPr lang="en-US" dirty="0"/>
+              <a:t> </a:t>
+            </a:r>
+            <a:r>
+              <a:rPr lang="en-US" dirty="0" err="1"/>
+              <a:t>định</a:t>
+            </a:r>
+            <a:r>
+              <a:rPr lang="en-US" dirty="0"/>
+              <a:t>.</a:t>
+            </a:r>
+          </a:p>
+        </p:txBody>
+      </p:sp>
+    </p:spTree>
+    <p:extLst>
+      <p:ext uri="{BB962C8B-B14F-4D97-AF65-F5344CB8AC3E}">
+        <p14:creationId xmlns:p14="http://schemas.microsoft.com/office/powerpoint/2010/main" val="654830637"/>
+      </p:ext>
+    </p:extLst>
+  </p:cSld>
+  <p:clrMapOvr>
+    <a:masterClrMapping/>
+  </p:clrMapOvr>
+</p:sld>
+</file>
+
+<file path=ppt/slides/slide22.xml><?xml version="1.0" encoding="utf-8"?>
+<p:sld xmlns:a="http://schemas.openxmlformats.org/drawingml/2006/main" xmlns:r="http://schemas.openxmlformats.org/officeDocument/2006/relationships" xmlns:p="http://schemas.openxmlformats.org/presentationml/2006/main">
+  <p:cSld>
+    <p:spTree>
+      <p:nvGrpSpPr>
+        <p:cNvPr id="1" name=""/>
+        <p:cNvGrpSpPr/>
+        <p:nvPr/>
+      </p:nvGrpSpPr>
+      <p:grpSpPr>
+        <a:xfrm>
+          <a:off x="0" y="0"/>
+          <a:ext cx="0" cy="0"/>
+          <a:chOff x="0" y="0"/>
+          <a:chExt cx="0" cy="0"/>
+        </a:xfrm>
+      </p:grpSpPr>
+      <p:sp>
+        <p:nvSpPr>
+          <p:cNvPr id="4" name="TextBox 3"/>
+          <p:cNvSpPr txBox="1"/>
+          <p:nvPr/>
+        </p:nvSpPr>
+        <p:spPr>
+          <a:xfrm>
+            <a:off x="1280160" y="705394"/>
+            <a:ext cx="851002" cy="369332"/>
+          </a:xfrm>
+          <a:prstGeom prst="rect">
+            <a:avLst/>
+          </a:prstGeom>
+          <a:noFill/>
+        </p:spPr>
+        <p:txBody>
+          <a:bodyPr wrap="none" rtlCol="0">
+            <a:spAutoFit/>
+          </a:bodyPr>
+          <a:lstStyle/>
+          <a:p>
+            <a:r>
+              <a:rPr lang="en-US" dirty="0" smtClean="0"/>
+              <a:t>Macro:</a:t>
+            </a:r>
+            <a:endParaRPr lang="en-US" dirty="0"/>
+          </a:p>
+        </p:txBody>
+      </p:sp>
+      <p:pic>
+        <p:nvPicPr>
+          <p:cNvPr id="5" name="Picture 4"/>
+          <p:cNvPicPr>
+            <a:picLocks noChangeAspect="1"/>
+          </p:cNvPicPr>
+          <p:nvPr/>
+        </p:nvPicPr>
+        <p:blipFill>
+          <a:blip r:embed="rId2"/>
+          <a:stretch>
+            <a:fillRect/>
+          </a:stretch>
+        </p:blipFill>
+        <p:spPr>
+          <a:xfrm>
+            <a:off x="1280160" y="1074726"/>
+            <a:ext cx="3353268" cy="514422"/>
+          </a:xfrm>
+          <a:prstGeom prst="rect">
+            <a:avLst/>
+          </a:prstGeom>
+        </p:spPr>
+      </p:pic>
+    </p:spTree>
+    <p:extLst>
+      <p:ext uri="{BB962C8B-B14F-4D97-AF65-F5344CB8AC3E}">
+        <p14:creationId xmlns:p14="http://schemas.microsoft.com/office/powerpoint/2010/main" val="2366694453"/>
       </p:ext>
     </p:extLst>
   </p:cSld>
@@ -9227,11 +13556,7 @@
             </a:pPr>
             <a:r>
               <a:rPr lang="vi-VN" dirty="0" smtClean="0"/>
-              <a:t>Một số thanh ghi được lưu </a:t>
-            </a:r>
-            <a:r>
-              <a:rPr lang="vi-VN" dirty="0" smtClean="0"/>
-              <a:t>tạm</a:t>
+              <a:t>Một số thanh ghi được lưu tạm</a:t>
             </a:r>
             <a:r>
               <a:rPr lang="en-US" dirty="0" smtClean="0"/>
